--- a/projects/WaferEngine/docs/2026-06-28/wse_per_pe_resource_analysis.pptx
+++ b/projects/WaferEngine/docs/2026-06-28/wse_per_pe_resource_analysis.pptx
@@ -5,18 +5,17 @@
     <p:sldMasterId id="2147483648" r:id="rId1"/>
   </p:sldMasterIdLst>
   <p:sldIdLst>
-    <p:sldId id="256" r:id="rId7"/>
-    <p:sldId id="257" r:id="rId8"/>
-    <p:sldId id="258" r:id="rId9"/>
-    <p:sldId id="259" r:id="rId10"/>
-    <p:sldId id="260" r:id="rId11"/>
-    <p:sldId id="261" r:id="rId12"/>
-    <p:sldId id="262" r:id="rId13"/>
-    <p:sldId id="263" r:id="rId14"/>
-    <p:sldId id="264" r:id="rId15"/>
-    <p:sldId id="265" r:id="rId16"/>
+    <p:sldId id="256" r:id="rId2"/>
+    <p:sldId id="257" r:id="rId3"/>
+    <p:sldId id="258" r:id="rId4"/>
+    <p:sldId id="259" r:id="rId5"/>
+    <p:sldId id="260" r:id="rId6"/>
+    <p:sldId id="262" r:id="rId7"/>
+    <p:sldId id="263" r:id="rId8"/>
+    <p:sldId id="264" r:id="rId9"/>
+    <p:sldId id="265" r:id="rId10"/>
   </p:sldIdLst>
-  <p:sldSz cx="12191695" cy="6858000" type="screen4x3"/>
+  <p:sldSz cx="12192000" cy="6858000"/>
   <p:notesSz cx="6858000" cy="9144000"/>
   <p:defaultTextStyle>
     <a:defPPr>
@@ -113,6 +112,22 @@
       </a:defRPr>
     </a:lvl9pPr>
   </p:defaultTextStyle>
+  <p:extLst>
+    <p:ext uri="{EFAFB233-063F-42B5-8137-9DF3F51BA10A}">
+      <p15:sldGuideLst xmlns:p15="http://schemas.microsoft.com/office/powerpoint/2012/main">
+        <p15:guide id="1" orient="horz" pos="2160">
+          <p15:clr>
+            <a:srgbClr val="A4A3A4"/>
+          </p15:clr>
+        </p15:guide>
+        <p15:guide id="2" pos="2880">
+          <p15:clr>
+            <a:srgbClr val="A4A3A4"/>
+          </p15:clr>
+        </p15:guide>
+      </p15:sldGuideLst>
+    </p:ext>
+  </p:extLst>
 </p:presentation>
 </file>
 
@@ -154,10 +169,9 @@
           <a:lstStyle/>
           <a:p>
             <a:r>
-              <a:rPr lang="en-US" smtClean="0"/>
+              <a:rPr lang="en-US"/>
               <a:t>Click to edit Master title style</a:t>
             </a:r>
-            <a:endParaRPr lang="en-US"/>
           </a:p>
         </p:txBody>
       </p:sp>
@@ -273,10 +287,9 @@
           </a:lstStyle>
           <a:p>
             <a:r>
-              <a:rPr lang="en-US" smtClean="0"/>
+              <a:rPr lang="en-US"/>
               <a:t>Click to edit Master subtitle style</a:t>
             </a:r>
-            <a:endParaRPr lang="en-US"/>
           </a:p>
         </p:txBody>
       </p:sp>
@@ -297,7 +310,7 @@
           <a:p>
             <a:fld id="{5BCAD085-E8A6-8845-BD4E-CB4CCA059FC4}" type="datetimeFigureOut">
               <a:rPr lang="en-US" smtClean="0"/>
-              <a:t>1/27/13</a:t>
+              <a:t>6/29/26</a:t>
             </a:fld>
             <a:endParaRPr lang="en-US"/>
           </a:p>
@@ -391,10 +404,9 @@
           <a:lstStyle/>
           <a:p>
             <a:r>
-              <a:rPr lang="en-US" smtClean="0"/>
+              <a:rPr lang="en-US"/>
               <a:t>Click to edit Master title style</a:t>
             </a:r>
-            <a:endParaRPr lang="en-US"/>
           </a:p>
         </p:txBody>
       </p:sp>
@@ -415,38 +427,37 @@
           <a:p>
             <a:pPr lvl="0"/>
             <a:r>
-              <a:rPr lang="en-US" smtClean="0"/>
+              <a:rPr lang="en-US"/>
               <a:t>Click to edit Master text styles</a:t>
             </a:r>
           </a:p>
           <a:p>
             <a:pPr lvl="1"/>
             <a:r>
-              <a:rPr lang="en-US" smtClean="0"/>
+              <a:rPr lang="en-US"/>
               <a:t>Second level</a:t>
             </a:r>
           </a:p>
           <a:p>
             <a:pPr lvl="2"/>
             <a:r>
-              <a:rPr lang="en-US" smtClean="0"/>
+              <a:rPr lang="en-US"/>
               <a:t>Third level</a:t>
             </a:r>
           </a:p>
           <a:p>
             <a:pPr lvl="3"/>
             <a:r>
-              <a:rPr lang="en-US" smtClean="0"/>
+              <a:rPr lang="en-US"/>
               <a:t>Fourth level</a:t>
             </a:r>
           </a:p>
           <a:p>
             <a:pPr lvl="4"/>
             <a:r>
-              <a:rPr lang="en-US" smtClean="0"/>
+              <a:rPr lang="en-US"/>
               <a:t>Fifth level</a:t>
             </a:r>
-            <a:endParaRPr lang="en-US"/>
           </a:p>
         </p:txBody>
       </p:sp>
@@ -467,7 +478,7 @@
           <a:p>
             <a:fld id="{5BCAD085-E8A6-8845-BD4E-CB4CCA059FC4}" type="datetimeFigureOut">
               <a:rPr lang="en-US" smtClean="0"/>
-              <a:t>1/27/13</a:t>
+              <a:t>6/29/26</a:t>
             </a:fld>
             <a:endParaRPr lang="en-US"/>
           </a:p>
@@ -566,10 +577,9 @@
           <a:lstStyle/>
           <a:p>
             <a:r>
-              <a:rPr lang="en-US" smtClean="0"/>
+              <a:rPr lang="en-US"/>
               <a:t>Click to edit Master title style</a:t>
             </a:r>
-            <a:endParaRPr lang="en-US"/>
           </a:p>
         </p:txBody>
       </p:sp>
@@ -595,38 +605,37 @@
           <a:p>
             <a:pPr lvl="0"/>
             <a:r>
-              <a:rPr lang="en-US" smtClean="0"/>
+              <a:rPr lang="en-US"/>
               <a:t>Click to edit Master text styles</a:t>
             </a:r>
           </a:p>
           <a:p>
             <a:pPr lvl="1"/>
             <a:r>
-              <a:rPr lang="en-US" smtClean="0"/>
+              <a:rPr lang="en-US"/>
               <a:t>Second level</a:t>
             </a:r>
           </a:p>
           <a:p>
             <a:pPr lvl="2"/>
             <a:r>
-              <a:rPr lang="en-US" smtClean="0"/>
+              <a:rPr lang="en-US"/>
               <a:t>Third level</a:t>
             </a:r>
           </a:p>
           <a:p>
             <a:pPr lvl="3"/>
             <a:r>
-              <a:rPr lang="en-US" smtClean="0"/>
+              <a:rPr lang="en-US"/>
               <a:t>Fourth level</a:t>
             </a:r>
           </a:p>
           <a:p>
             <a:pPr lvl="4"/>
             <a:r>
-              <a:rPr lang="en-US" smtClean="0"/>
+              <a:rPr lang="en-US"/>
               <a:t>Fifth level</a:t>
             </a:r>
-            <a:endParaRPr lang="en-US"/>
           </a:p>
         </p:txBody>
       </p:sp>
@@ -647,7 +656,7 @@
           <a:p>
             <a:fld id="{5BCAD085-E8A6-8845-BD4E-CB4CCA059FC4}" type="datetimeFigureOut">
               <a:rPr lang="en-US" smtClean="0"/>
-              <a:t>1/27/13</a:t>
+              <a:t>6/29/26</a:t>
             </a:fld>
             <a:endParaRPr lang="en-US"/>
           </a:p>
@@ -741,10 +750,9 @@
           <a:lstStyle/>
           <a:p>
             <a:r>
-              <a:rPr lang="en-US" smtClean="0"/>
+              <a:rPr lang="en-US"/>
               <a:t>Click to edit Master title style</a:t>
             </a:r>
-            <a:endParaRPr lang="en-US"/>
           </a:p>
         </p:txBody>
       </p:sp>
@@ -765,38 +773,37 @@
           <a:p>
             <a:pPr lvl="0"/>
             <a:r>
-              <a:rPr lang="en-US" smtClean="0"/>
+              <a:rPr lang="en-US"/>
               <a:t>Click to edit Master text styles</a:t>
             </a:r>
           </a:p>
           <a:p>
             <a:pPr lvl="1"/>
             <a:r>
-              <a:rPr lang="en-US" smtClean="0"/>
+              <a:rPr lang="en-US"/>
               <a:t>Second level</a:t>
             </a:r>
           </a:p>
           <a:p>
             <a:pPr lvl="2"/>
             <a:r>
-              <a:rPr lang="en-US" smtClean="0"/>
+              <a:rPr lang="en-US"/>
               <a:t>Third level</a:t>
             </a:r>
           </a:p>
           <a:p>
             <a:pPr lvl="3"/>
             <a:r>
-              <a:rPr lang="en-US" smtClean="0"/>
+              <a:rPr lang="en-US"/>
               <a:t>Fourth level</a:t>
             </a:r>
           </a:p>
           <a:p>
             <a:pPr lvl="4"/>
             <a:r>
-              <a:rPr lang="en-US" smtClean="0"/>
+              <a:rPr lang="en-US"/>
               <a:t>Fifth level</a:t>
             </a:r>
-            <a:endParaRPr lang="en-US"/>
           </a:p>
         </p:txBody>
       </p:sp>
@@ -817,7 +824,7 @@
           <a:p>
             <a:fld id="{5BCAD085-E8A6-8845-BD4E-CB4CCA059FC4}" type="datetimeFigureOut">
               <a:rPr lang="en-US" smtClean="0"/>
-              <a:t>1/27/13</a:t>
+              <a:t>6/29/26</a:t>
             </a:fld>
             <a:endParaRPr lang="en-US"/>
           </a:p>
@@ -920,10 +927,9 @@
           </a:lstStyle>
           <a:p>
             <a:r>
-              <a:rPr lang="en-US" smtClean="0"/>
+              <a:rPr lang="en-US"/>
               <a:t>Click to edit Master title style</a:t>
             </a:r>
-            <a:endParaRPr lang="en-US"/>
           </a:p>
         </p:txBody>
       </p:sp>
@@ -1040,7 +1046,7 @@
           <a:p>
             <a:pPr lvl="0"/>
             <a:r>
-              <a:rPr lang="en-US" smtClean="0"/>
+              <a:rPr lang="en-US"/>
               <a:t>Click to edit Master text styles</a:t>
             </a:r>
           </a:p>
@@ -1063,7 +1069,7 @@
           <a:p>
             <a:fld id="{5BCAD085-E8A6-8845-BD4E-CB4CCA059FC4}" type="datetimeFigureOut">
               <a:rPr lang="en-US" smtClean="0"/>
-              <a:t>1/27/13</a:t>
+              <a:t>6/29/26</a:t>
             </a:fld>
             <a:endParaRPr lang="en-US"/>
           </a:p>
@@ -1157,10 +1163,9 @@
           <a:lstStyle/>
           <a:p>
             <a:r>
-              <a:rPr lang="en-US" smtClean="0"/>
+              <a:rPr lang="en-US"/>
               <a:t>Click to edit Master title style</a:t>
             </a:r>
-            <a:endParaRPr lang="en-US"/>
           </a:p>
         </p:txBody>
       </p:sp>
@@ -1214,38 +1219,37 @@
           <a:p>
             <a:pPr lvl="0"/>
             <a:r>
-              <a:rPr lang="en-US" smtClean="0"/>
+              <a:rPr lang="en-US"/>
               <a:t>Click to edit Master text styles</a:t>
             </a:r>
           </a:p>
           <a:p>
             <a:pPr lvl="1"/>
             <a:r>
-              <a:rPr lang="en-US" smtClean="0"/>
+              <a:rPr lang="en-US"/>
               <a:t>Second level</a:t>
             </a:r>
           </a:p>
           <a:p>
             <a:pPr lvl="2"/>
             <a:r>
-              <a:rPr lang="en-US" smtClean="0"/>
+              <a:rPr lang="en-US"/>
               <a:t>Third level</a:t>
             </a:r>
           </a:p>
           <a:p>
             <a:pPr lvl="3"/>
             <a:r>
-              <a:rPr lang="en-US" smtClean="0"/>
+              <a:rPr lang="en-US"/>
               <a:t>Fourth level</a:t>
             </a:r>
           </a:p>
           <a:p>
             <a:pPr lvl="4"/>
             <a:r>
-              <a:rPr lang="en-US" smtClean="0"/>
+              <a:rPr lang="en-US"/>
               <a:t>Fifth level</a:t>
             </a:r>
-            <a:endParaRPr lang="en-US"/>
           </a:p>
         </p:txBody>
       </p:sp>
@@ -1299,38 +1303,37 @@
           <a:p>
             <a:pPr lvl="0"/>
             <a:r>
-              <a:rPr lang="en-US" smtClean="0"/>
+              <a:rPr lang="en-US"/>
               <a:t>Click to edit Master text styles</a:t>
             </a:r>
           </a:p>
           <a:p>
             <a:pPr lvl="1"/>
             <a:r>
-              <a:rPr lang="en-US" smtClean="0"/>
+              <a:rPr lang="en-US"/>
               <a:t>Second level</a:t>
             </a:r>
           </a:p>
           <a:p>
             <a:pPr lvl="2"/>
             <a:r>
-              <a:rPr lang="en-US" smtClean="0"/>
+              <a:rPr lang="en-US"/>
               <a:t>Third level</a:t>
             </a:r>
           </a:p>
           <a:p>
             <a:pPr lvl="3"/>
             <a:r>
-              <a:rPr lang="en-US" smtClean="0"/>
+              <a:rPr lang="en-US"/>
               <a:t>Fourth level</a:t>
             </a:r>
           </a:p>
           <a:p>
             <a:pPr lvl="4"/>
             <a:r>
-              <a:rPr lang="en-US" smtClean="0"/>
+              <a:rPr lang="en-US"/>
               <a:t>Fifth level</a:t>
             </a:r>
-            <a:endParaRPr lang="en-US"/>
           </a:p>
         </p:txBody>
       </p:sp>
@@ -1351,7 +1354,7 @@
           <a:p>
             <a:fld id="{5BCAD085-E8A6-8845-BD4E-CB4CCA059FC4}" type="datetimeFigureOut">
               <a:rPr lang="en-US" smtClean="0"/>
-              <a:t>1/27/13</a:t>
+              <a:t>6/29/26</a:t>
             </a:fld>
             <a:endParaRPr lang="en-US"/>
           </a:p>
@@ -1449,10 +1452,9 @@
           </a:lstStyle>
           <a:p>
             <a:r>
-              <a:rPr lang="en-US" smtClean="0"/>
+              <a:rPr lang="en-US"/>
               <a:t>Click to edit Master title style</a:t>
             </a:r>
-            <a:endParaRPr lang="en-US"/>
           </a:p>
         </p:txBody>
       </p:sp>
@@ -1515,7 +1517,7 @@
           <a:p>
             <a:pPr lvl="0"/>
             <a:r>
-              <a:rPr lang="en-US" smtClean="0"/>
+              <a:rPr lang="en-US"/>
               <a:t>Click to edit Master text styles</a:t>
             </a:r>
           </a:p>
@@ -1571,38 +1573,37 @@
           <a:p>
             <a:pPr lvl="0"/>
             <a:r>
-              <a:rPr lang="en-US" smtClean="0"/>
+              <a:rPr lang="en-US"/>
               <a:t>Click to edit Master text styles</a:t>
             </a:r>
           </a:p>
           <a:p>
             <a:pPr lvl="1"/>
             <a:r>
-              <a:rPr lang="en-US" smtClean="0"/>
+              <a:rPr lang="en-US"/>
               <a:t>Second level</a:t>
             </a:r>
           </a:p>
           <a:p>
             <a:pPr lvl="2"/>
             <a:r>
-              <a:rPr lang="en-US" smtClean="0"/>
+              <a:rPr lang="en-US"/>
               <a:t>Third level</a:t>
             </a:r>
           </a:p>
           <a:p>
             <a:pPr lvl="3"/>
             <a:r>
-              <a:rPr lang="en-US" smtClean="0"/>
+              <a:rPr lang="en-US"/>
               <a:t>Fourth level</a:t>
             </a:r>
           </a:p>
           <a:p>
             <a:pPr lvl="4"/>
             <a:r>
-              <a:rPr lang="en-US" smtClean="0"/>
+              <a:rPr lang="en-US"/>
               <a:t>Fifth level</a:t>
             </a:r>
-            <a:endParaRPr lang="en-US"/>
           </a:p>
         </p:txBody>
       </p:sp>
@@ -1665,7 +1666,7 @@
           <a:p>
             <a:pPr lvl="0"/>
             <a:r>
-              <a:rPr lang="en-US" smtClean="0"/>
+              <a:rPr lang="en-US"/>
               <a:t>Click to edit Master text styles</a:t>
             </a:r>
           </a:p>
@@ -1721,38 +1722,37 @@
           <a:p>
             <a:pPr lvl="0"/>
             <a:r>
-              <a:rPr lang="en-US" smtClean="0"/>
+              <a:rPr lang="en-US"/>
               <a:t>Click to edit Master text styles</a:t>
             </a:r>
           </a:p>
           <a:p>
             <a:pPr lvl="1"/>
             <a:r>
-              <a:rPr lang="en-US" smtClean="0"/>
+              <a:rPr lang="en-US"/>
               <a:t>Second level</a:t>
             </a:r>
           </a:p>
           <a:p>
             <a:pPr lvl="2"/>
             <a:r>
-              <a:rPr lang="en-US" smtClean="0"/>
+              <a:rPr lang="en-US"/>
               <a:t>Third level</a:t>
             </a:r>
           </a:p>
           <a:p>
             <a:pPr lvl="3"/>
             <a:r>
-              <a:rPr lang="en-US" smtClean="0"/>
+              <a:rPr lang="en-US"/>
               <a:t>Fourth level</a:t>
             </a:r>
           </a:p>
           <a:p>
             <a:pPr lvl="4"/>
             <a:r>
-              <a:rPr lang="en-US" smtClean="0"/>
+              <a:rPr lang="en-US"/>
               <a:t>Fifth level</a:t>
             </a:r>
-            <a:endParaRPr lang="en-US"/>
           </a:p>
         </p:txBody>
       </p:sp>
@@ -1773,7 +1773,7 @@
           <a:p>
             <a:fld id="{5BCAD085-E8A6-8845-BD4E-CB4CCA059FC4}" type="datetimeFigureOut">
               <a:rPr lang="en-US" smtClean="0"/>
-              <a:t>1/27/13</a:t>
+              <a:t>6/29/26</a:t>
             </a:fld>
             <a:endParaRPr lang="en-US"/>
           </a:p>
@@ -1867,10 +1867,9 @@
           <a:lstStyle/>
           <a:p>
             <a:r>
-              <a:rPr lang="en-US" smtClean="0"/>
+              <a:rPr lang="en-US"/>
               <a:t>Click to edit Master title style</a:t>
             </a:r>
-            <a:endParaRPr lang="en-US"/>
           </a:p>
         </p:txBody>
       </p:sp>
@@ -1891,7 +1890,7 @@
           <a:p>
             <a:fld id="{5BCAD085-E8A6-8845-BD4E-CB4CCA059FC4}" type="datetimeFigureOut">
               <a:rPr lang="en-US" smtClean="0"/>
-              <a:t>1/27/13</a:t>
+              <a:t>6/29/26</a:t>
             </a:fld>
             <a:endParaRPr lang="en-US"/>
           </a:p>
@@ -1986,7 +1985,7 @@
           <a:p>
             <a:fld id="{5BCAD085-E8A6-8845-BD4E-CB4CCA059FC4}" type="datetimeFigureOut">
               <a:rPr lang="en-US" smtClean="0"/>
-              <a:t>1/27/13</a:t>
+              <a:t>6/29/26</a:t>
             </a:fld>
             <a:endParaRPr lang="en-US"/>
           </a:p>
@@ -2089,10 +2088,9 @@
           </a:lstStyle>
           <a:p>
             <a:r>
-              <a:rPr lang="en-US" smtClean="0"/>
+              <a:rPr lang="en-US"/>
               <a:t>Click to edit Master title style</a:t>
             </a:r>
-            <a:endParaRPr lang="en-US"/>
           </a:p>
         </p:txBody>
       </p:sp>
@@ -2146,38 +2144,37 @@
           <a:p>
             <a:pPr lvl="0"/>
             <a:r>
-              <a:rPr lang="en-US" smtClean="0"/>
+              <a:rPr lang="en-US"/>
               <a:t>Click to edit Master text styles</a:t>
             </a:r>
           </a:p>
           <a:p>
             <a:pPr lvl="1"/>
             <a:r>
-              <a:rPr lang="en-US" smtClean="0"/>
+              <a:rPr lang="en-US"/>
               <a:t>Second level</a:t>
             </a:r>
           </a:p>
           <a:p>
             <a:pPr lvl="2"/>
             <a:r>
-              <a:rPr lang="en-US" smtClean="0"/>
+              <a:rPr lang="en-US"/>
               <a:t>Third level</a:t>
             </a:r>
           </a:p>
           <a:p>
             <a:pPr lvl="3"/>
             <a:r>
-              <a:rPr lang="en-US" smtClean="0"/>
+              <a:rPr lang="en-US"/>
               <a:t>Fourth level</a:t>
             </a:r>
           </a:p>
           <a:p>
             <a:pPr lvl="4"/>
             <a:r>
-              <a:rPr lang="en-US" smtClean="0"/>
+              <a:rPr lang="en-US"/>
               <a:t>Fifth level</a:t>
             </a:r>
-            <a:endParaRPr lang="en-US"/>
           </a:p>
         </p:txBody>
       </p:sp>
@@ -2240,7 +2237,7 @@
           <a:p>
             <a:pPr lvl="0"/>
             <a:r>
-              <a:rPr lang="en-US" smtClean="0"/>
+              <a:rPr lang="en-US"/>
               <a:t>Click to edit Master text styles</a:t>
             </a:r>
           </a:p>
@@ -2263,7 +2260,7 @@
           <a:p>
             <a:fld id="{5BCAD085-E8A6-8845-BD4E-CB4CCA059FC4}" type="datetimeFigureOut">
               <a:rPr lang="en-US" smtClean="0"/>
-              <a:t>1/27/13</a:t>
+              <a:t>6/29/26</a:t>
             </a:fld>
             <a:endParaRPr lang="en-US"/>
           </a:p>
@@ -2366,10 +2363,9 @@
           </a:lstStyle>
           <a:p>
             <a:r>
-              <a:rPr lang="en-US" smtClean="0"/>
+              <a:rPr lang="en-US"/>
               <a:t>Click to edit Master title style</a:t>
             </a:r>
-            <a:endParaRPr lang="en-US"/>
           </a:p>
         </p:txBody>
       </p:sp>
@@ -2493,7 +2489,7 @@
           <a:p>
             <a:pPr lvl="0"/>
             <a:r>
-              <a:rPr lang="en-US" smtClean="0"/>
+              <a:rPr lang="en-US"/>
               <a:t>Click to edit Master text styles</a:t>
             </a:r>
           </a:p>
@@ -2516,7 +2512,7 @@
           <a:p>
             <a:fld id="{5BCAD085-E8A6-8845-BD4E-CB4CCA059FC4}" type="datetimeFigureOut">
               <a:rPr lang="en-US" smtClean="0"/>
-              <a:t>1/27/13</a:t>
+              <a:t>6/29/26</a:t>
             </a:fld>
             <a:endParaRPr lang="en-US"/>
           </a:p>
@@ -2625,10 +2621,9 @@
           <a:lstStyle/>
           <a:p>
             <a:r>
-              <a:rPr lang="en-US" smtClean="0"/>
+              <a:rPr lang="en-US"/>
               <a:t>Click to edit Master title style</a:t>
             </a:r>
-            <a:endParaRPr lang="en-US"/>
           </a:p>
         </p:txBody>
       </p:sp>
@@ -2659,38 +2654,37 @@
           <a:p>
             <a:pPr lvl="0"/>
             <a:r>
-              <a:rPr lang="en-US" smtClean="0"/>
+              <a:rPr lang="en-US"/>
               <a:t>Click to edit Master text styles</a:t>
             </a:r>
           </a:p>
           <a:p>
             <a:pPr lvl="1"/>
             <a:r>
-              <a:rPr lang="en-US" smtClean="0"/>
+              <a:rPr lang="en-US"/>
               <a:t>Second level</a:t>
             </a:r>
           </a:p>
           <a:p>
             <a:pPr lvl="2"/>
             <a:r>
-              <a:rPr lang="en-US" smtClean="0"/>
+              <a:rPr lang="en-US"/>
               <a:t>Third level</a:t>
             </a:r>
           </a:p>
           <a:p>
             <a:pPr lvl="3"/>
             <a:r>
-              <a:rPr lang="en-US" smtClean="0"/>
+              <a:rPr lang="en-US"/>
               <a:t>Fourth level</a:t>
             </a:r>
           </a:p>
           <a:p>
             <a:pPr lvl="4"/>
             <a:r>
-              <a:rPr lang="en-US" smtClean="0"/>
+              <a:rPr lang="en-US"/>
               <a:t>Fifth level</a:t>
             </a:r>
-            <a:endParaRPr lang="en-US"/>
           </a:p>
         </p:txBody>
       </p:sp>
@@ -2729,7 +2723,7 @@
           <a:p>
             <a:fld id="{5BCAD085-E8A6-8845-BD4E-CB4CCA059FC4}" type="datetimeFigureOut">
               <a:rPr lang="en-US" smtClean="0"/>
-              <a:t>1/27/13</a:t>
+              <a:t>6/29/26</a:t>
             </a:fld>
             <a:endParaRPr lang="en-US"/>
           </a:p>
@@ -3088,7 +3082,7 @@
 </file>
 
 <file path=ppt/slides/slide1.xml><?xml version="1.0" encoding="utf-8"?>
-<p:sld xmlns:a="http://schemas.openxmlformats.org/drawingml/2006/main" xmlns:p="http://schemas.openxmlformats.org/presentationml/2006/main" xmlns:r="http://schemas.openxmlformats.org/officeDocument/2006/relationships">
+<p:sld xmlns:a="http://schemas.openxmlformats.org/drawingml/2006/main" xmlns:r="http://schemas.openxmlformats.org/officeDocument/2006/relationships" xmlns:p="http://schemas.openxmlformats.org/presentationml/2006/main">
   <p:cSld>
     <p:spTree>
       <p:nvGrpSpPr>
@@ -3096,7 +3090,14 @@
         <p:cNvGrpSpPr/>
         <p:nvPr/>
       </p:nvGrpSpPr>
-      <p:grpSpPr/>
+      <p:grpSpPr>
+        <a:xfrm>
+          <a:off x="0" y="0"/>
+          <a:ext cx="0" cy="0"/>
+          <a:chOff x="0" y="0"/>
+          <a:chExt cx="0" cy="0"/>
+        </a:xfrm>
+      </p:grpSpPr>
       <p:sp>
         <p:nvSpPr>
           <p:cNvPr id="2" name="Rectangle 1"/>
@@ -3137,6 +3138,7 @@
           <a:lstStyle/>
           <a:p>
             <a:pPr algn="ctr"/>
+            <a:endParaRPr/>
           </a:p>
         </p:txBody>
       </p:sp>
@@ -3195,8 +3197,8 @@
 </p:sld>
 </file>
 
-<file path=ppt/slides/slide10.xml><?xml version="1.0" encoding="utf-8"?>
-<p:sld xmlns:a="http://schemas.openxmlformats.org/drawingml/2006/main" xmlns:p="http://schemas.openxmlformats.org/presentationml/2006/main" xmlns:r="http://schemas.openxmlformats.org/officeDocument/2006/relationships">
+<file path=ppt/slides/slide2.xml><?xml version="1.0" encoding="utf-8"?>
+<p:sld xmlns:a="http://schemas.openxmlformats.org/drawingml/2006/main" xmlns:r="http://schemas.openxmlformats.org/officeDocument/2006/relationships" xmlns:p="http://schemas.openxmlformats.org/presentationml/2006/main">
   <p:cSld>
     <p:spTree>
       <p:nvGrpSpPr>
@@ -3204,7 +3206,14 @@
         <p:cNvGrpSpPr/>
         <p:nvPr/>
       </p:nvGrpSpPr>
-      <p:grpSpPr/>
+      <p:grpSpPr>
+        <a:xfrm>
+          <a:off x="0" y="0"/>
+          <a:ext cx="0" cy="0"/>
+          <a:chOff x="0" y="0"/>
+          <a:chExt cx="0" cy="0"/>
+        </a:xfrm>
+      </p:grpSpPr>
       <p:sp>
         <p:nvSpPr>
           <p:cNvPr id="2" name="Rectangle 1"/>
@@ -3245,6 +3254,7 @@
           <a:lstStyle/>
           <a:p>
             <a:pPr algn="ctr"/>
+            <a:endParaRPr/>
           </a:p>
         </p:txBody>
       </p:sp>
@@ -3278,7 +3288,7 @@
               </a:defRPr>
             </a:pPr>
             <a:r>
-              <a:t>Takeaways &amp; where to find everything</a:t>
+              <a:t>Why this is hard: no shared memory</a:t>
             </a:r>
           </a:p>
         </p:txBody>
@@ -3316,7 +3326,7 @@
               </a:defRPr>
             </a:pPr>
             <a:r>
-              <a:t>• Two scarce per-core resources on the wafer: 48 KB SRAM and 24 colors.</a:t>
+              <a:t>• A GPU has one big shared memory (HBM). A Cerebras wafer is ~900,000 tiny cores (PEs), each with its own tiny 48 KB of memory — nothing shared.</a:t>
             </a:r>
           </a:p>
           <a:p>
@@ -3331,7 +3341,7 @@
               </a:defRPr>
             </a:pPr>
             <a:r>
-              <a:t>• SRAM: code (~half) is the dominant, replicated cost; KV is the residual; max context = 22,784 tokens (measured).</a:t>
+              <a:t>• To run an LLM you must REPLICATE the program on every core and SPLIT the weights across them.</a:t>
             </a:r>
           </a:p>
           <a:p>
@@ -3346,7 +3356,7 @@
               </a:defRPr>
             </a:pPr>
             <a:r>
-              <a:t>• Colors: decode 8/24 (reconfig-heavy), prefill 17/24 (MeshGEMM-heavy); neither is color-bound.</a:t>
+              <a:t>• So each core has very little room left for the KV cache (the running context) — which caps the sequence length.</a:t>
             </a:r>
           </a:p>
           <a:p>
@@ -3361,7 +3371,7 @@
               </a:defRPr>
             </a:pPr>
             <a:r>
-              <a:t>• All analysis is per-role static -&gt; cheap and reproducible.</a:t>
+              <a:t>• Two scarce per-core resources: (1) 48 KB SRAM, and (2) 24 'colors' — the fabric communication channels.</a:t>
             </a:r>
           </a:p>
           <a:p>
@@ -3376,37 +3386,7 @@
               </a:defRPr>
             </a:pPr>
             <a:r>
-              <a:t>• Traceable: branch  lexu/pe-mem-breakdown   (WaferEngine repo).</a:t>
-            </a:r>
-          </a:p>
-          <a:p>
-            <a:pPr lvl="1">
-              <a:spcAft>
-                <a:spcPts val="700"/>
-              </a:spcAft>
-              <a:defRPr sz="1500">
-                <a:solidFill>
-                  <a:srgbClr val="555555"/>
-                </a:solidFill>
-              </a:defRPr>
-            </a:pPr>
-            <a:r>
-              <a:t>– tool + plots: tools/pe_mem_breakdown/   ·   results/{decode,prefill}/</a:t>
-            </a:r>
-          </a:p>
-          <a:p>
-            <a:pPr lvl="1">
-              <a:spcAft>
-                <a:spcPts val="700"/>
-              </a:spcAft>
-              <a:defRPr sz="1500">
-                <a:solidFill>
-                  <a:srgbClr val="555555"/>
-                </a:solidFill>
-              </a:defRPr>
-            </a:pPr>
-            <a:r>
-              <a:t>– key commits: 33ecf27 (heatmaps), 023cf1d (seq-len probe), 0869200 (color map).</a:t>
+              <a:t>• Question: what does ONE core actually hold and use? We built a tool to find out, and ran it on real silicon.</a:t>
             </a:r>
           </a:p>
         </p:txBody>
@@ -3419,8 +3399,8 @@
 </p:sld>
 </file>
 
-<file path=ppt/slides/slide2.xml><?xml version="1.0" encoding="utf-8"?>
-<p:sld xmlns:a="http://schemas.openxmlformats.org/drawingml/2006/main" xmlns:p="http://schemas.openxmlformats.org/presentationml/2006/main" xmlns:r="http://schemas.openxmlformats.org/officeDocument/2006/relationships">
+<file path=ppt/slides/slide3.xml><?xml version="1.0" encoding="utf-8"?>
+<p:sld xmlns:a="http://schemas.openxmlformats.org/drawingml/2006/main" xmlns:r="http://schemas.openxmlformats.org/officeDocument/2006/relationships" xmlns:p="http://schemas.openxmlformats.org/presentationml/2006/main">
   <p:cSld>
     <p:spTree>
       <p:nvGrpSpPr>
@@ -3428,7 +3408,14 @@
         <p:cNvGrpSpPr/>
         <p:nvPr/>
       </p:nvGrpSpPr>
-      <p:grpSpPr/>
+      <p:grpSpPr>
+        <a:xfrm>
+          <a:off x="0" y="0"/>
+          <a:ext cx="0" cy="0"/>
+          <a:chOff x="0" y="0"/>
+          <a:chExt cx="0" cy="0"/>
+        </a:xfrm>
+      </p:grpSpPr>
       <p:sp>
         <p:nvSpPr>
           <p:cNvPr id="2" name="Rectangle 1"/>
@@ -3469,6 +3456,7 @@
           <a:lstStyle/>
           <a:p>
             <a:pPr algn="ctr"/>
+            <a:endParaRPr/>
           </a:p>
         </p:txBody>
       </p:sp>
@@ -3502,7 +3490,7 @@
               </a:defRPr>
             </a:pPr>
             <a:r>
-              <a:t>Why this is hard: no shared memory</a:t>
+              <a:t>Method: X-ray every PE on real hardware</a:t>
             </a:r>
           </a:p>
         </p:txBody>
@@ -3540,7 +3528,7 @@
               </a:defRPr>
             </a:pPr>
             <a:r>
-              <a:t>• A GPU has one big shared memory (HBM). A Cerebras wafer is ~900,000 tiny cores (PEs), each with its own tiny 48 KB of memory — nothing shared.</a:t>
+              <a:t>• Compile each kernel (decode &amp; prefill) on a real CS-3, for the full 762x1172 fabric.</a:t>
             </a:r>
           </a:p>
           <a:p>
@@ -3555,7 +3543,7 @@
               </a:defRPr>
             </a:pPr>
             <a:r>
-              <a:t>• To run an LLM you must REPLICATE the program on every core and SPLIT the weights across them.</a:t>
+              <a:t>• Read each PE's memory map (cs-readelf) + the compiled binaries, and classify every byte: code / weights / KV cache / activations / system / free.</a:t>
             </a:r>
           </a:p>
           <a:p>
@@ -3570,7 +3558,7 @@
               </a:defRPr>
             </a:pPr>
             <a:r>
-              <a:t>• So each core has very little room left for the KV cache (the running context) — which caps the sequence length.</a:t>
+              <a:t>• Covered all ~329,000 placed PEs — but the result is really PER-ROLE (every PE of the same role is identical), so it's a fast static analysis.</a:t>
             </a:r>
           </a:p>
           <a:p>
@@ -3585,7 +3573,7 @@
               </a:defRPr>
             </a:pPr>
             <a:r>
-              <a:t>• Two scarce per-core resources: (1) 48 KB SRAM, and (2) 24 'colors' — the fabric communication channels.</a:t>
+              <a:t>• Also analyzed fabric-COLOR usage per microstep from the kernel source.</a:t>
             </a:r>
           </a:p>
           <a:p>
@@ -3600,7 +3588,7 @@
               </a:defRPr>
             </a:pPr>
             <a:r>
-              <a:t>• Question: what does ONE core actually hold and use? We built a tool to find out, and ran it on real silicon.</a:t>
+              <a:t>• Tool: tools/pe_mem_breakdown/  (28 tests, reconciles to the byte).</a:t>
             </a:r>
           </a:p>
         </p:txBody>
@@ -3613,8 +3601,8 @@
 </p:sld>
 </file>
 
-<file path=ppt/slides/slide3.xml><?xml version="1.0" encoding="utf-8"?>
-<p:sld xmlns:a="http://schemas.openxmlformats.org/drawingml/2006/main" xmlns:p="http://schemas.openxmlformats.org/presentationml/2006/main" xmlns:r="http://schemas.openxmlformats.org/officeDocument/2006/relationships">
+<file path=ppt/slides/slide4.xml><?xml version="1.0" encoding="utf-8"?>
+<p:sld xmlns:a="http://schemas.openxmlformats.org/drawingml/2006/main" xmlns:r="http://schemas.openxmlformats.org/officeDocument/2006/relationships" xmlns:p="http://schemas.openxmlformats.org/presentationml/2006/main">
   <p:cSld>
     <p:spTree>
       <p:nvGrpSpPr>
@@ -3622,7 +3610,14 @@
         <p:cNvGrpSpPr/>
         <p:nvPr/>
       </p:nvGrpSpPr>
-      <p:grpSpPr/>
+      <p:grpSpPr>
+        <a:xfrm>
+          <a:off x="0" y="0"/>
+          <a:ext cx="0" cy="0"/>
+          <a:chOff x="0" y="0"/>
+          <a:chExt cx="0" cy="0"/>
+        </a:xfrm>
+      </p:grpSpPr>
       <p:sp>
         <p:nvSpPr>
           <p:cNvPr id="2" name="Rectangle 1"/>
@@ -3663,6 +3658,7 @@
           <a:lstStyle/>
           <a:p>
             <a:pPr algn="ctr"/>
+            <a:endParaRPr/>
           </a:p>
         </p:txBody>
       </p:sp>
@@ -3696,21 +3692,45 @@
               </a:defRPr>
             </a:pPr>
             <a:r>
-              <a:t>Method: X-ray every PE on real hardware</a:t>
-            </a:r>
-          </a:p>
-        </p:txBody>
-      </p:sp>
-      <p:sp>
-        <p:nvSpPr>
-          <p:cNvPr id="4" name="TextBox 3"/>
+              <a:t>Finding 1: code eats half of every core</a:t>
+            </a:r>
+          </a:p>
+        </p:txBody>
+      </p:sp>
+      <p:pic>
+        <p:nvPicPr>
+          <p:cNvPr id="4" name="Picture 3" descr="decode_stacked.png"/>
+          <p:cNvPicPr>
+            <a:picLocks noChangeAspect="1"/>
+          </p:cNvPicPr>
+          <p:nvPr/>
+        </p:nvPicPr>
+        <p:blipFill>
+          <a:blip r:embed="rId2"/>
+          <a:stretch>
+            <a:fillRect/>
+          </a:stretch>
+        </p:blipFill>
+        <p:spPr>
+          <a:xfrm>
+            <a:off x="365760" y="1005840"/>
+            <a:ext cx="6531429" cy="4572000"/>
+          </a:xfrm>
+          <a:prstGeom prst="rect">
+            <a:avLst/>
+          </a:prstGeom>
+        </p:spPr>
+      </p:pic>
+      <p:sp>
+        <p:nvSpPr>
+          <p:cNvPr id="5" name="TextBox 4"/>
           <p:cNvSpPr txBox="1"/>
           <p:nvPr/>
         </p:nvSpPr>
         <p:spPr>
           <a:xfrm>
-            <a:off x="457200" y="1097280"/>
-            <a:ext cx="11430000" cy="5394960"/>
+            <a:off x="8412480" y="1097280"/>
+            <a:ext cx="3566160" cy="5394960"/>
           </a:xfrm>
           <a:prstGeom prst="rect">
             <a:avLst/>
@@ -3725,76 +3745,61 @@
           <a:p>
             <a:pPr>
               <a:spcAft>
-                <a:spcPts val="700"/>
+                <a:spcPts val="800"/>
               </a:spcAft>
-              <a:defRPr sz="1800">
+              <a:defRPr sz="1500">
                 <a:solidFill>
                   <a:srgbClr val="222222"/>
                 </a:solidFill>
               </a:defRPr>
             </a:pPr>
             <a:r>
-              <a:t>• Compile each kernel (decode &amp; prefill) on a real CS-3, for the full 762x1172 fabric.</a:t>
+              <a:t>• Each compute PE: ~22 KB CODE + ~11 KB weights.</a:t>
             </a:r>
           </a:p>
           <a:p>
             <a:pPr>
               <a:spcAft>
-                <a:spcPts val="700"/>
+                <a:spcPts val="800"/>
               </a:spcAft>
-              <a:defRPr sz="1800">
+              <a:defRPr sz="1500">
                 <a:solidFill>
                   <a:srgbClr val="222222"/>
                 </a:solidFill>
               </a:defRPr>
             </a:pPr>
             <a:r>
-              <a:t>• Read each PE's memory map (cs-readelf) + the compiled binaries, and classify every byte: code / weights / KV cache / activations / system / free.</a:t>
+              <a:t>• CODE = the full transformer-layer program, copied onto every one of ~65,000 compute cores.</a:t>
             </a:r>
           </a:p>
           <a:p>
             <a:pPr>
               <a:spcAft>
-                <a:spcPts val="700"/>
+                <a:spcPts val="800"/>
               </a:spcAft>
-              <a:defRPr sz="1800">
+              <a:defRPr sz="1500">
                 <a:solidFill>
                   <a:srgbClr val="222222"/>
                 </a:solidFill>
               </a:defRPr>
             </a:pPr>
             <a:r>
-              <a:t>• Covered all ~329,000 placed PEs — but the result is really PER-ROLE (every PE of the same role is identical), so it's a fast static analysis.</a:t>
+              <a:t>• KV cache is tiny (&lt;0.3 KB) — it gets only the leftover ~11 KB.</a:t>
             </a:r>
           </a:p>
           <a:p>
             <a:pPr>
               <a:spcAft>
-                <a:spcPts val="700"/>
+                <a:spcPts val="800"/>
               </a:spcAft>
-              <a:defRPr sz="1800">
+              <a:defRPr sz="1500">
                 <a:solidFill>
                   <a:srgbClr val="222222"/>
                 </a:solidFill>
               </a:defRPr>
             </a:pPr>
             <a:r>
-              <a:t>• Also analyzed fabric-COLOR usage per microstep from the kernel source.</a:t>
-            </a:r>
-          </a:p>
-          <a:p>
-            <a:pPr>
-              <a:spcAft>
-                <a:spcPts val="700"/>
-              </a:spcAft>
-              <a:defRPr sz="1800">
-                <a:solidFill>
-                  <a:srgbClr val="222222"/>
-                </a:solidFill>
-              </a:defRPr>
-            </a:pPr>
-            <a:r>
-              <a:t>• Tool: tools/pe_mem_breakdown/  (28 tests, reconciles to the byte).</a:t>
+              <a:t>• ht_head/ht_tail cores are weight-bound (embedding / output table).</a:t>
             </a:r>
           </a:p>
         </p:txBody>
@@ -3807,8 +3812,8 @@
 </p:sld>
 </file>
 
-<file path=ppt/slides/slide4.xml><?xml version="1.0" encoding="utf-8"?>
-<p:sld xmlns:a="http://schemas.openxmlformats.org/drawingml/2006/main" xmlns:p="http://schemas.openxmlformats.org/presentationml/2006/main" xmlns:r="http://schemas.openxmlformats.org/officeDocument/2006/relationships">
+<file path=ppt/slides/slide5.xml><?xml version="1.0" encoding="utf-8"?>
+<p:sld xmlns:a="http://schemas.openxmlformats.org/drawingml/2006/main" xmlns:r="http://schemas.openxmlformats.org/officeDocument/2006/relationships" xmlns:p="http://schemas.openxmlformats.org/presentationml/2006/main">
   <p:cSld>
     <p:spTree>
       <p:nvGrpSpPr>
@@ -3816,7 +3821,14 @@
         <p:cNvGrpSpPr/>
         <p:nvPr/>
       </p:nvGrpSpPr>
-      <p:grpSpPr/>
+      <p:grpSpPr>
+        <a:xfrm>
+          <a:off x="0" y="0"/>
+          <a:ext cx="0" cy="0"/>
+          <a:chOff x="0" y="0"/>
+          <a:chExt cx="0" cy="0"/>
+        </a:xfrm>
+      </p:grpSpPr>
       <p:sp>
         <p:nvSpPr>
           <p:cNvPr id="2" name="Rectangle 1"/>
@@ -3857,6 +3869,7 @@
           <a:lstStyle/>
           <a:p>
             <a:pPr algn="ctr"/>
+            <a:endParaRPr/>
           </a:p>
         </p:txBody>
       </p:sp>
@@ -3890,14 +3903,14 @@
               </a:defRPr>
             </a:pPr>
             <a:r>
-              <a:t>Finding 1: code eats half of every core</a:t>
+              <a:t>Where the blocks live on the wafer</a:t>
             </a:r>
           </a:p>
         </p:txBody>
       </p:sp>
       <p:pic>
         <p:nvPicPr>
-          <p:cNvPr id="4" name="Picture 3" descr="decode_stacked.png"/>
+          <p:cNvPr id="4" name="Picture 3" descr="decode_placement_map.png"/>
           <p:cNvPicPr>
             <a:picLocks noChangeAspect="1"/>
           </p:cNvPicPr>
@@ -3911,8 +3924,8 @@
         </p:blipFill>
         <p:spPr>
           <a:xfrm>
-            <a:off x="365760" y="1005840"/>
-            <a:ext cx="6531429" cy="4572000"/>
+            <a:off x="511570" y="978408"/>
+            <a:ext cx="7900910" cy="5893762"/>
           </a:xfrm>
           <a:prstGeom prst="rect">
             <a:avLst/>
@@ -3952,7 +3965,7 @@
               </a:defRPr>
             </a:pPr>
             <a:r>
-              <a:t>• Each compute PE: ~22 KB CODE + ~11 KB weights.</a:t>
+              <a:t>• The kernel is laid out as functional blocks on the 2-D grid.</a:t>
             </a:r>
           </a:p>
           <a:p>
@@ -3967,7 +3980,7 @@
               </a:defRPr>
             </a:pPr>
             <a:r>
-              <a:t>• CODE = the full transformer-layer program, copied onto every one of ~65,000 compute cores.</a:t>
+              <a:t>• Big area = the 2x2 compute blocks (the transformer layers).</a:t>
             </a:r>
           </a:p>
           <a:p>
@@ -3982,7 +3995,7 @@
               </a:defRPr>
             </a:pPr>
             <a:r>
-              <a:t>• KV cache is tiny (&lt;0.3 KB) — it gets only the leftover ~11 KB.</a:t>
+              <a:t>• Thin left band = embedding (ht_head) + output/sampling (ht_tail).</a:t>
             </a:r>
           </a:p>
           <a:p>
@@ -3997,8 +4010,163 @@
               </a:defRPr>
             </a:pPr>
             <a:r>
-              <a:t>• ht_head/ht_tail cores are weight-bound (embedding / output table).</a:t>
-            </a:r>
+              <a:t>• We can map any metric (code, weights, KV, free...) to its (x,y) coordinate as a heatmap.</a:t>
+            </a:r>
+          </a:p>
+        </p:txBody>
+      </p:sp>
+      <p:sp>
+        <p:nvSpPr>
+          <p:cNvPr id="7" name="Freeform 6">
+            <a:extLst>
+              <a:ext uri="{FF2B5EF4-FFF2-40B4-BE49-F238E27FC236}">
+                <a16:creationId xmlns:a16="http://schemas.microsoft.com/office/drawing/2014/main" id="{6402CF8F-4979-2558-0592-4A9BE0065116}"/>
+              </a:ext>
+            </a:extLst>
+          </p:cNvPr>
+          <p:cNvSpPr/>
+          <p:nvPr/>
+        </p:nvSpPr>
+        <p:spPr>
+          <a:xfrm>
+            <a:off x="1259489" y="1075038"/>
+            <a:ext cx="6302846" cy="5708821"/>
+          </a:xfrm>
+          <a:custGeom>
+            <a:avLst/>
+            <a:gdLst>
+              <a:gd name="connsiteX0" fmla="*/ 198608 w 6476060"/>
+              <a:gd name="connsiteY0" fmla="*/ 5708821 h 5708821"/>
+              <a:gd name="connsiteX1" fmla="*/ 210965 w 6476060"/>
+              <a:gd name="connsiteY1" fmla="*/ 4955059 h 5708821"/>
+              <a:gd name="connsiteX2" fmla="*/ 2361041 w 6476060"/>
+              <a:gd name="connsiteY2" fmla="*/ 4769708 h 5708821"/>
+              <a:gd name="connsiteX3" fmla="*/ 5017743 w 6476060"/>
+              <a:gd name="connsiteY3" fmla="*/ 4769708 h 5708821"/>
+              <a:gd name="connsiteX4" fmla="*/ 6302846 w 6476060"/>
+              <a:gd name="connsiteY4" fmla="*/ 4324865 h 5708821"/>
+              <a:gd name="connsiteX5" fmla="*/ 6302846 w 6476060"/>
+              <a:gd name="connsiteY5" fmla="*/ 1470454 h 5708821"/>
+              <a:gd name="connsiteX6" fmla="*/ 4820035 w 6476060"/>
+              <a:gd name="connsiteY6" fmla="*/ 951470 h 5708821"/>
+              <a:gd name="connsiteX7" fmla="*/ 1916197 w 6476060"/>
+              <a:gd name="connsiteY7" fmla="*/ 1000897 h 5708821"/>
+              <a:gd name="connsiteX8" fmla="*/ 272749 w 6476060"/>
+              <a:gd name="connsiteY8" fmla="*/ 1099751 h 5708821"/>
+              <a:gd name="connsiteX9" fmla="*/ 25614 w 6476060"/>
+              <a:gd name="connsiteY9" fmla="*/ 0 h 5708821"/>
+            </a:gdLst>
+            <a:ahLst/>
+            <a:cxnLst>
+              <a:cxn ang="0">
+                <a:pos x="connsiteX0" y="connsiteY0"/>
+              </a:cxn>
+              <a:cxn ang="0">
+                <a:pos x="connsiteX1" y="connsiteY1"/>
+              </a:cxn>
+              <a:cxn ang="0">
+                <a:pos x="connsiteX2" y="connsiteY2"/>
+              </a:cxn>
+              <a:cxn ang="0">
+                <a:pos x="connsiteX3" y="connsiteY3"/>
+              </a:cxn>
+              <a:cxn ang="0">
+                <a:pos x="connsiteX4" y="connsiteY4"/>
+              </a:cxn>
+              <a:cxn ang="0">
+                <a:pos x="connsiteX5" y="connsiteY5"/>
+              </a:cxn>
+              <a:cxn ang="0">
+                <a:pos x="connsiteX6" y="connsiteY6"/>
+              </a:cxn>
+              <a:cxn ang="0">
+                <a:pos x="connsiteX7" y="connsiteY7"/>
+              </a:cxn>
+              <a:cxn ang="0">
+                <a:pos x="connsiteX8" y="connsiteY8"/>
+              </a:cxn>
+              <a:cxn ang="0">
+                <a:pos x="connsiteX9" y="connsiteY9"/>
+              </a:cxn>
+            </a:cxnLst>
+            <a:rect l="l" t="t" r="r" b="b"/>
+            <a:pathLst>
+              <a:path w="6476060" h="5708821">
+                <a:moveTo>
+                  <a:pt x="198608" y="5708821"/>
+                </a:moveTo>
+                <a:cubicBezTo>
+                  <a:pt x="24584" y="5410199"/>
+                  <a:pt x="-149440" y="5111578"/>
+                  <a:pt x="210965" y="4955059"/>
+                </a:cubicBezTo>
+                <a:cubicBezTo>
+                  <a:pt x="571370" y="4798540"/>
+                  <a:pt x="1559911" y="4800600"/>
+                  <a:pt x="2361041" y="4769708"/>
+                </a:cubicBezTo>
+                <a:cubicBezTo>
+                  <a:pt x="3162171" y="4738816"/>
+                  <a:pt x="4360776" y="4843848"/>
+                  <a:pt x="5017743" y="4769708"/>
+                </a:cubicBezTo>
+                <a:cubicBezTo>
+                  <a:pt x="5674711" y="4695567"/>
+                  <a:pt x="6088662" y="4874741"/>
+                  <a:pt x="6302846" y="4324865"/>
+                </a:cubicBezTo>
+                <a:cubicBezTo>
+                  <a:pt x="6517030" y="3774989"/>
+                  <a:pt x="6549981" y="2032687"/>
+                  <a:pt x="6302846" y="1470454"/>
+                </a:cubicBezTo>
+                <a:cubicBezTo>
+                  <a:pt x="6055711" y="908221"/>
+                  <a:pt x="5551143" y="1029729"/>
+                  <a:pt x="4820035" y="951470"/>
+                </a:cubicBezTo>
+                <a:cubicBezTo>
+                  <a:pt x="4088927" y="873211"/>
+                  <a:pt x="2674078" y="976184"/>
+                  <a:pt x="1916197" y="1000897"/>
+                </a:cubicBezTo>
+                <a:cubicBezTo>
+                  <a:pt x="1158316" y="1025610"/>
+                  <a:pt x="587846" y="1266567"/>
+                  <a:pt x="272749" y="1099751"/>
+                </a:cubicBezTo>
+                <a:cubicBezTo>
+                  <a:pt x="-42348" y="932935"/>
+                  <a:pt x="-8367" y="466467"/>
+                  <a:pt x="25614" y="0"/>
+                </a:cubicBezTo>
+              </a:path>
+            </a:pathLst>
+          </a:custGeom>
+          <a:ln w="38100">
+            <a:tailEnd type="triangle"/>
+          </a:ln>
+        </p:spPr>
+        <p:style>
+          <a:lnRef idx="1">
+            <a:schemeClr val="accent2"/>
+          </a:lnRef>
+          <a:fillRef idx="0">
+            <a:schemeClr val="accent2"/>
+          </a:fillRef>
+          <a:effectRef idx="0">
+            <a:schemeClr val="accent2"/>
+          </a:effectRef>
+          <a:fontRef idx="minor">
+            <a:schemeClr val="tx1"/>
+          </a:fontRef>
+        </p:style>
+        <p:txBody>
+          <a:bodyPr rtlCol="0" anchor="ctr"/>
+          <a:lstStyle/>
+          <a:p>
+            <a:pPr algn="ctr"/>
+            <a:endParaRPr lang="en-US"/>
           </a:p>
         </p:txBody>
       </p:sp>
@@ -4010,8 +4178,8 @@
 </p:sld>
 </file>
 
-<file path=ppt/slides/slide5.xml><?xml version="1.0" encoding="utf-8"?>
-<p:sld xmlns:a="http://schemas.openxmlformats.org/drawingml/2006/main" xmlns:p="http://schemas.openxmlformats.org/presentationml/2006/main" xmlns:r="http://schemas.openxmlformats.org/officeDocument/2006/relationships">
+<file path=ppt/slides/slide6.xml><?xml version="1.0" encoding="utf-8"?>
+<p:sld xmlns:a="http://schemas.openxmlformats.org/drawingml/2006/main" xmlns:r="http://schemas.openxmlformats.org/officeDocument/2006/relationships" xmlns:p="http://schemas.openxmlformats.org/presentationml/2006/main">
   <p:cSld>
     <p:spTree>
       <p:nvGrpSpPr>
@@ -4019,7 +4187,14 @@
         <p:cNvGrpSpPr/>
         <p:nvPr/>
       </p:nvGrpSpPr>
-      <p:grpSpPr/>
+      <p:grpSpPr>
+        <a:xfrm>
+          <a:off x="0" y="0"/>
+          <a:ext cx="0" cy="0"/>
+          <a:chOff x="0" y="0"/>
+          <a:chExt cx="0" cy="0"/>
+        </a:xfrm>
+      </p:grpSpPr>
       <p:sp>
         <p:nvSpPr>
           <p:cNvPr id="2" name="Rectangle 1"/>
@@ -4060,6 +4235,7 @@
           <a:lstStyle/>
           <a:p>
             <a:pPr algn="ctr"/>
+            <a:endParaRPr/>
           </a:p>
         </p:txBody>
       </p:sp>
@@ -4093,45 +4269,21 @@
               </a:defRPr>
             </a:pPr>
             <a:r>
-              <a:t>Where the blocks live on the wafer</a:t>
-            </a:r>
-          </a:p>
-        </p:txBody>
-      </p:sp>
-      <p:pic>
-        <p:nvPicPr>
-          <p:cNvPr id="4" name="Picture 3" descr="decode_placement_map.png"/>
-          <p:cNvPicPr>
-            <a:picLocks noChangeAspect="1"/>
-          </p:cNvPicPr>
+              <a:t>Finding 2: max context = 22,784 tokens (44x the default)</a:t>
+            </a:r>
+          </a:p>
+        </p:txBody>
+      </p:sp>
+      <p:sp>
+        <p:nvSpPr>
+          <p:cNvPr id="4" name="TextBox 3"/>
+          <p:cNvSpPr txBox="1"/>
           <p:nvPr/>
-        </p:nvPicPr>
-        <p:blipFill>
-          <a:blip r:embed="rId2"/>
-          <a:stretch>
-            <a:fillRect/>
-          </a:stretch>
-        </p:blipFill>
+        </p:nvSpPr>
         <p:spPr>
           <a:xfrm>
-            <a:off x="365760" y="1005840"/>
-            <a:ext cx="6129016" cy="4572000"/>
-          </a:xfrm>
-          <a:prstGeom prst="rect">
-            <a:avLst/>
-          </a:prstGeom>
-        </p:spPr>
-      </p:pic>
-      <p:sp>
-        <p:nvSpPr>
-          <p:cNvPr id="5" name="TextBox 4"/>
-          <p:cNvSpPr txBox="1"/>
-          <p:nvPr/>
-        </p:nvSpPr>
-        <p:spPr>
-          <a:xfrm>
-            <a:off x="8412480" y="1097280"/>
-            <a:ext cx="3566160" cy="5394960"/>
+            <a:off x="457200" y="1097280"/>
+            <a:ext cx="11430000" cy="5394960"/>
           </a:xfrm>
           <a:prstGeom prst="rect">
             <a:avLst/>
@@ -4146,61 +4298,91 @@
           <a:p>
             <a:pPr>
               <a:spcAft>
-                <a:spcPts val="800"/>
+                <a:spcPts val="700"/>
+              </a:spcAft>
+              <a:defRPr sz="1800">
+                <a:solidFill>
+                  <a:srgbClr val="222222"/>
+                </a:solidFill>
+              </a:defRPr>
+            </a:pPr>
+            <a:r>
+              <a:t>• qwen3-1.7B is light, so the leftover ~11 KB is real headroom for KV.</a:t>
+            </a:r>
+          </a:p>
+          <a:p>
+            <a:pPr>
+              <a:spcAft>
+                <a:spcPts val="700"/>
+              </a:spcAft>
+              <a:defRPr sz="1800">
+                <a:solidFill>
+                  <a:srgbClr val="222222"/>
+                </a:solidFill>
+              </a:defRPr>
+            </a:pPr>
+            <a:r>
+              <a:t>• We swept the sequence length on real hardware (compile + place):</a:t>
+            </a:r>
+          </a:p>
+          <a:p>
+            <a:pPr lvl="1">
+              <a:spcAft>
+                <a:spcPts val="700"/>
               </a:spcAft>
               <a:defRPr sz="1500">
                 <a:solidFill>
-                  <a:srgbClr val="222222"/>
+                  <a:srgbClr val="555555"/>
                 </a:solidFill>
               </a:defRPr>
             </a:pPr>
             <a:r>
-              <a:t>• The kernel is laid out as functional blocks on the 2-D grid.</a:t>
+              <a:t>– PASS up to 22,784 tokens; FAILS (out of memory) at 23,040.</a:t>
+            </a:r>
+          </a:p>
+          <a:p>
+            <a:pPr lvl="1">
+              <a:spcAft>
+                <a:spcPts val="700"/>
+              </a:spcAft>
+              <a:defRPr sz="1500">
+                <a:solidFill>
+                  <a:srgbClr val="555555"/>
+                </a:solidFill>
+              </a:defRPr>
+            </a:pPr>
+            <a:r>
+              <a:t>– That's 44.5x the shipped default of 512.</a:t>
             </a:r>
           </a:p>
           <a:p>
             <a:pPr>
               <a:spcAft>
-                <a:spcPts val="800"/>
+                <a:spcPts val="700"/>
               </a:spcAft>
-              <a:defRPr sz="1500">
+              <a:defRPr sz="1800">
                 <a:solidFill>
                   <a:srgbClr val="222222"/>
                 </a:solidFill>
               </a:defRPr>
             </a:pPr>
             <a:r>
-              <a:t>• Big area = the 2x2 compute blocks (the transformer layers).</a:t>
+              <a:t>• KV costs ~0.44 bytes/token per core; the ~11 KB free fills until the last ~1 KB (needed for placement) is gone.</a:t>
             </a:r>
           </a:p>
           <a:p>
             <a:pPr>
               <a:spcAft>
-                <a:spcPts val="800"/>
+                <a:spcPts val="700"/>
               </a:spcAft>
-              <a:defRPr sz="1500">
+              <a:defRPr sz="1800">
                 <a:solidFill>
                   <a:srgbClr val="222222"/>
                 </a:solidFill>
               </a:defRPr>
             </a:pPr>
             <a:r>
-              <a:t>• Thin left band = embedding (ht_head) + output/sampling (ht_tail).</a:t>
-            </a:r>
-          </a:p>
-          <a:p>
-            <a:pPr>
-              <a:spcAft>
-                <a:spcPts val="800"/>
-              </a:spcAft>
-              <a:defRPr sz="1500">
-                <a:solidFill>
-                  <a:srgbClr val="222222"/>
-                </a:solidFill>
-              </a:defRPr>
-            </a:pPr>
-            <a:r>
-              <a:t>• We can map any metric (code, weights, KV, free...) to its (x,y) coordinate as a heatmap.</a:t>
+              <a:t>• Caveat: this is the compile/fit ceiling, for one request (batch size 1).</a:t>
             </a:r>
           </a:p>
         </p:txBody>
@@ -4213,8 +4395,8 @@
 </p:sld>
 </file>
 
-<file path=ppt/slides/slide6.xml><?xml version="1.0" encoding="utf-8"?>
-<p:sld xmlns:a="http://schemas.openxmlformats.org/drawingml/2006/main" xmlns:p="http://schemas.openxmlformats.org/presentationml/2006/main" xmlns:r="http://schemas.openxmlformats.org/officeDocument/2006/relationships">
+<file path=ppt/slides/slide7.xml><?xml version="1.0" encoding="utf-8"?>
+<p:sld xmlns:a="http://schemas.openxmlformats.org/drawingml/2006/main" xmlns:r="http://schemas.openxmlformats.org/officeDocument/2006/relationships" xmlns:p="http://schemas.openxmlformats.org/presentationml/2006/main">
   <p:cSld>
     <p:spTree>
       <p:nvGrpSpPr>
@@ -4222,7 +4404,14 @@
         <p:cNvGrpSpPr/>
         <p:nvPr/>
       </p:nvGrpSpPr>
-      <p:grpSpPr/>
+      <p:grpSpPr>
+        <a:xfrm>
+          <a:off x="0" y="0"/>
+          <a:ext cx="0" cy="0"/>
+          <a:chOff x="0" y="0"/>
+          <a:chExt cx="0" cy="0"/>
+        </a:xfrm>
+      </p:grpSpPr>
       <p:sp>
         <p:nvSpPr>
           <p:cNvPr id="2" name="Rectangle 1"/>
@@ -4263,6 +4452,7 @@
           <a:lstStyle/>
           <a:p>
             <a:pPr algn="ctr"/>
+            <a:endParaRPr/>
           </a:p>
         </p:txBody>
       </p:sp>
@@ -4296,97 +4486,14 @@
               </a:defRPr>
             </a:pPr>
             <a:r>
-              <a:t>Finding 1 — what it means</a:t>
-            </a:r>
-          </a:p>
-        </p:txBody>
-      </p:sp>
-      <p:sp>
-        <p:nvSpPr>
-          <p:cNvPr id="4" name="TextBox 3"/>
-          <p:cNvSpPr txBox="1"/>
-          <p:nvPr/>
-        </p:nvSpPr>
-        <p:spPr>
-          <a:xfrm>
-            <a:off x="457200" y="1097280"/>
-            <a:ext cx="5486400" cy="5394960"/>
-          </a:xfrm>
-          <a:prstGeom prst="rect">
-            <a:avLst/>
-          </a:prstGeom>
-          <a:noFill/>
-        </p:spPr>
-        <p:txBody>
-          <a:bodyPr wrap="square">
-            <a:spAutoFit/>
-          </a:bodyPr>
-          <a:lstStyle/>
-          <a:p>
-            <a:pPr>
-              <a:spcAft>
-                <a:spcPts val="700"/>
-              </a:spcAft>
-              <a:defRPr sz="1800">
-                <a:solidFill>
-                  <a:srgbClr val="222222"/>
-                </a:solidFill>
-              </a:defRPr>
-            </a:pPr>
-            <a:r>
-              <a:t>• The 'disaggregated-memory tax': you pay for the whole program ~65,000 times, before a single weight or KV byte.</a:t>
-            </a:r>
-          </a:p>
-          <a:p>
-            <a:pPr>
-              <a:spcAft>
-                <a:spcPts val="700"/>
-              </a:spcAft>
-              <a:defRPr sz="1800">
-                <a:solidFill>
-                  <a:srgbClr val="222222"/>
-                </a:solidFill>
-              </a:defRPr>
-            </a:pPr>
-            <a:r>
-              <a:t>• Cores of the same role are memory-IDENTICAL on silicon (verified over all 329K PEs) — no surprises, no per-core variation.</a:t>
-            </a:r>
-          </a:p>
-          <a:p>
-            <a:pPr>
-              <a:spcAft>
-                <a:spcPts val="700"/>
-              </a:spcAft>
-              <a:defRPr sz="1800">
-                <a:solidFill>
-                  <a:srgbClr val="222222"/>
-                </a:solidFill>
-              </a:defRPr>
-            </a:pPr>
-            <a:r>
-              <a:t>• Busy cores run ~77-82% full. KV is the squeezed residual.</a:t>
-            </a:r>
-          </a:p>
-          <a:p>
-            <a:pPr>
-              <a:spcAft>
-                <a:spcPts val="700"/>
-              </a:spcAft>
-              <a:defRPr sz="1800">
-                <a:solidFill>
-                  <a:srgbClr val="222222"/>
-                </a:solidFill>
-              </a:defRPr>
-            </a:pPr>
-            <a:r>
-              <a:t>• Consequence: max sequence length is limited by CODE + WEIGHTS, not by a 'KV cache size' choice. To go longer you must shrink code/weights.</a:t>
+              <a:t>Finding 3: 'colors' are the other scarce resource</a:t>
             </a:r>
           </a:p>
         </p:txBody>
       </p:sp>
       <p:pic>
         <p:nvPicPr>
-          <p:cNvPr id="5" name="Picture 4" descr="decode_heatmaps_all.png"/>
+          <p:cNvPr id="4" name="Picture 3" descr="decode_color_usage.png"/>
           <p:cNvPicPr>
             <a:picLocks noChangeAspect="1"/>
           </p:cNvPicPr>
@@ -4400,8 +4507,8 @@
         </p:blipFill>
         <p:spPr>
           <a:xfrm>
-            <a:off x="6126480" y="1143000"/>
-            <a:ext cx="5760720" cy="2755127"/>
+            <a:off x="365760" y="1005840"/>
+            <a:ext cx="6280045" cy="4572000"/>
           </a:xfrm>
           <a:prstGeom prst="rect">
             <a:avLst/>
@@ -4410,14 +4517,14 @@
       </p:pic>
       <p:sp>
         <p:nvSpPr>
-          <p:cNvPr id="6" name="TextBox 5"/>
+          <p:cNvPr id="5" name="TextBox 4"/>
           <p:cNvSpPr txBox="1"/>
           <p:nvPr/>
         </p:nvSpPr>
         <p:spPr>
           <a:xfrm>
-            <a:off x="6126480" y="6172200"/>
-            <a:ext cx="5760720" cy="457200"/>
+            <a:off x="8412480" y="1097280"/>
+            <a:ext cx="3566160" cy="5394960"/>
           </a:xfrm>
           <a:prstGeom prst="rect">
             <a:avLst/>
@@ -4430,15 +4537,63 @@
           </a:bodyPr>
           <a:lstStyle/>
           <a:p>
-            <a:pPr algn="ctr">
-              <a:defRPr sz="1100" i="1">
-                <a:solidFill>
-                  <a:srgbClr val="555555"/>
+            <a:pPr>
+              <a:spcAft>
+                <a:spcPts val="800"/>
+              </a:spcAft>
+              <a:defRPr sz="1500">
+                <a:solidFill>
+                  <a:srgbClr val="222222"/>
                 </a:solidFill>
               </a:defRPr>
             </a:pPr>
             <a:r>
-              <a:t>Per-PE memory by fabric coordinate (8 fields)</a:t>
+              <a:t>• 24 fabric 'colors' = communication channels. We mapped which are used in each microstep.</a:t>
+            </a:r>
+          </a:p>
+          <a:p>
+            <a:pPr>
+              <a:spcAft>
+                <a:spcPts val="800"/>
+              </a:spcAft>
+              <a:defRPr sz="1500">
+                <a:solidFill>
+                  <a:srgbClr val="222222"/>
+                </a:solidFill>
+              </a:defRPr>
+            </a:pPr>
+            <a:r>
+              <a:t>• DECODE uses only 8/24 on a compute core...</a:t>
+            </a:r>
+          </a:p>
+          <a:p>
+            <a:pPr>
+              <a:spcAft>
+                <a:spcPts val="800"/>
+              </a:spcAft>
+              <a:defRPr sz="1500">
+                <a:solidFill>
+                  <a:srgbClr val="222222"/>
+                </a:solidFill>
+              </a:defRPr>
+            </a:pPr>
+            <a:r>
+              <a:t>• ...because it REUSES 5 channels, repainting their routes 6x per layer (Y / X / band = the reduce direction).</a:t>
+            </a:r>
+          </a:p>
+          <a:p>
+            <a:pPr>
+              <a:spcAft>
+                <a:spcPts val="800"/>
+              </a:spcAft>
+              <a:defRPr sz="1500">
+                <a:solidFill>
+                  <a:srgbClr val="222222"/>
+                </a:solidFill>
+              </a:defRPr>
+            </a:pPr>
+            <a:r>
+              <a:t>• Local steps (RoPE, residuals) use no fabric at all.</a:t>
             </a:r>
           </a:p>
         </p:txBody>
@@ -4451,8 +4606,8 @@
 </p:sld>
 </file>
 
-<file path=ppt/slides/slide7.xml><?xml version="1.0" encoding="utf-8"?>
-<p:sld xmlns:a="http://schemas.openxmlformats.org/drawingml/2006/main" xmlns:p="http://schemas.openxmlformats.org/presentationml/2006/main" xmlns:r="http://schemas.openxmlformats.org/officeDocument/2006/relationships">
+<file path=ppt/slides/slide8.xml><?xml version="1.0" encoding="utf-8"?>
+<p:sld xmlns:a="http://schemas.openxmlformats.org/drawingml/2006/main" xmlns:r="http://schemas.openxmlformats.org/officeDocument/2006/relationships" xmlns:p="http://schemas.openxmlformats.org/presentationml/2006/main">
   <p:cSld>
     <p:spTree>
       <p:nvGrpSpPr>
@@ -4460,7 +4615,14 @@
         <p:cNvGrpSpPr/>
         <p:nvPr/>
       </p:nvGrpSpPr>
-      <p:grpSpPr/>
+      <p:grpSpPr>
+        <a:xfrm>
+          <a:off x="0" y="0"/>
+          <a:ext cx="0" cy="0"/>
+          <a:chOff x="0" y="0"/>
+          <a:chExt cx="0" cy="0"/>
+        </a:xfrm>
+      </p:grpSpPr>
       <p:sp>
         <p:nvSpPr>
           <p:cNvPr id="2" name="Rectangle 1"/>
@@ -4501,6 +4663,7 @@
           <a:lstStyle/>
           <a:p>
             <a:pPr algn="ctr"/>
+            <a:endParaRPr/>
           </a:p>
         </p:txBody>
       </p:sp>
@@ -4534,7 +4697,7 @@
               </a:defRPr>
             </a:pPr>
             <a:r>
-              <a:t>Finding 2: max context = 22,784 tokens (44x the default)</a:t>
+              <a:t>The decode &lt;-&gt; prefill trade-off</a:t>
             </a:r>
           </a:p>
         </p:txBody>
@@ -4548,7 +4711,7 @@
         <p:spPr>
           <a:xfrm>
             <a:off x="457200" y="1097280"/>
-            <a:ext cx="11430000" cy="5394960"/>
+            <a:ext cx="5486400" cy="5394960"/>
           </a:xfrm>
           <a:prstGeom prst="rect">
             <a:avLst/>
@@ -4572,7 +4735,7 @@
               </a:defRPr>
             </a:pPr>
             <a:r>
-              <a:t>• qwen3-1.7B is light, so the leftover ~11 KB is real headroom for KV.</a:t>
+              <a:t>• DECODE = color-frugal, reconfiguration-heavy: 8/24 colors; reuses 5 and repaints their routes every step.</a:t>
             </a:r>
           </a:p>
           <a:p>
@@ -4587,7 +4750,7 @@
               </a:defRPr>
             </a:pPr>
             <a:r>
-              <a:t>• We swept the sequence length on real hardware (compile + place):</a:t>
+              <a:t>• PREFILL = color-hungry, reconfiguration-light: 17/24 colors.</a:t>
             </a:r>
           </a:p>
           <a:p>
@@ -4602,22 +4765,7 @@
               </a:defRPr>
             </a:pPr>
             <a:r>
-              <a:t>– PASS up to 22,784 tokens; FAILS (out of memory) at 23,040.</a:t>
-            </a:r>
-          </a:p>
-          <a:p>
-            <a:pPr lvl="1">
-              <a:spcAft>
-                <a:spcPts val="700"/>
-              </a:spcAft>
-              <a:defRPr sz="1500">
-                <a:solidFill>
-                  <a:srgbClr val="555555"/>
-                </a:solidFill>
-              </a:defRPr>
-            </a:pPr>
-            <a:r>
-              <a:t>– That's 44.5x the shipped default of 512.</a:t>
+              <a:t>– Its matmuls use a systolic 'MeshGEMM' with 6 dedicated, statically-routed channels (never repainted mid-matmul).</a:t>
             </a:r>
           </a:p>
           <a:p>
@@ -4632,7 +4780,7 @@
               </a:defRPr>
             </a:pPr>
             <a:r>
-              <a:t>• KV costs ~0.44 bytes/token per core; the ~11 KB free fills until the last ~1 KB (needed for placement) is gone.</a:t>
+              <a:t>• So the two kernels trade the SAME two resources differently: decode spends route-repaint time to save colors; prefill spends colors to save time.</a:t>
             </a:r>
           </a:p>
           <a:p>
@@ -4647,7 +4795,66 @@
               </a:defRPr>
             </a:pPr>
             <a:r>
-              <a:t>• Caveat: this is the compile/fit ceiling, for one request (batch size 1).</a:t>
+              <a:t>• Both fit comfortably — neither is color-bound today.</a:t>
+            </a:r>
+          </a:p>
+        </p:txBody>
+      </p:sp>
+      <p:pic>
+        <p:nvPicPr>
+          <p:cNvPr id="5" name="Picture 4" descr="prefill_color_usage.png"/>
+          <p:cNvPicPr>
+            <a:picLocks noChangeAspect="1"/>
+          </p:cNvPicPr>
+          <p:nvPr/>
+        </p:nvPicPr>
+        <p:blipFill>
+          <a:blip r:embed="rId2"/>
+          <a:stretch>
+            <a:fillRect/>
+          </a:stretch>
+        </p:blipFill>
+        <p:spPr>
+          <a:xfrm>
+            <a:off x="6126480" y="1143000"/>
+            <a:ext cx="5760720" cy="4294422"/>
+          </a:xfrm>
+          <a:prstGeom prst="rect">
+            <a:avLst/>
+          </a:prstGeom>
+        </p:spPr>
+      </p:pic>
+      <p:sp>
+        <p:nvSpPr>
+          <p:cNvPr id="6" name="TextBox 5"/>
+          <p:cNvSpPr txBox="1"/>
+          <p:nvPr/>
+        </p:nvSpPr>
+        <p:spPr>
+          <a:xfrm>
+            <a:off x="6126480" y="6172200"/>
+            <a:ext cx="5760720" cy="457200"/>
+          </a:xfrm>
+          <a:prstGeom prst="rect">
+            <a:avLst/>
+          </a:prstGeom>
+          <a:noFill/>
+        </p:spPr>
+        <p:txBody>
+          <a:bodyPr wrap="square">
+            <a:spAutoFit/>
+          </a:bodyPr>
+          <a:lstStyle/>
+          <a:p>
+            <a:pPr algn="ctr">
+              <a:defRPr sz="1100" i="1">
+                <a:solidFill>
+                  <a:srgbClr val="555555"/>
+                </a:solidFill>
+              </a:defRPr>
+            </a:pPr>
+            <a:r>
+              <a:t>Prefill: 17/24 colors (MeshGEMM-heavy)</a:t>
             </a:r>
           </a:p>
         </p:txBody>
@@ -4660,8 +4867,8 @@
 </p:sld>
 </file>
 
-<file path=ppt/slides/slide8.xml><?xml version="1.0" encoding="utf-8"?>
-<p:sld xmlns:a="http://schemas.openxmlformats.org/drawingml/2006/main" xmlns:p="http://schemas.openxmlformats.org/presentationml/2006/main" xmlns:r="http://schemas.openxmlformats.org/officeDocument/2006/relationships">
+<file path=ppt/slides/slide9.xml><?xml version="1.0" encoding="utf-8"?>
+<p:sld xmlns:a="http://schemas.openxmlformats.org/drawingml/2006/main" xmlns:r="http://schemas.openxmlformats.org/officeDocument/2006/relationships" xmlns:p="http://schemas.openxmlformats.org/presentationml/2006/main">
   <p:cSld>
     <p:spTree>
       <p:nvGrpSpPr>
@@ -4669,7 +4876,14 @@
         <p:cNvGrpSpPr/>
         <p:nvPr/>
       </p:nvGrpSpPr>
-      <p:grpSpPr/>
+      <p:grpSpPr>
+        <a:xfrm>
+          <a:off x="0" y="0"/>
+          <a:ext cx="0" cy="0"/>
+          <a:chOff x="0" y="0"/>
+          <a:chExt cx="0" cy="0"/>
+        </a:xfrm>
+      </p:grpSpPr>
       <p:sp>
         <p:nvSpPr>
           <p:cNvPr id="2" name="Rectangle 1"/>
@@ -4710,6 +4924,7 @@
           <a:lstStyle/>
           <a:p>
             <a:pPr algn="ctr"/>
+            <a:endParaRPr/>
           </a:p>
         </p:txBody>
       </p:sp>
@@ -4743,45 +4958,21 @@
               </a:defRPr>
             </a:pPr>
             <a:r>
-              <a:t>Finding 3: 'colors' are the other scarce resource</a:t>
-            </a:r>
-          </a:p>
-        </p:txBody>
-      </p:sp>
-      <p:pic>
-        <p:nvPicPr>
-          <p:cNvPr id="4" name="Picture 3" descr="decode_color_usage.png"/>
-          <p:cNvPicPr>
-            <a:picLocks noChangeAspect="1"/>
-          </p:cNvPicPr>
+              <a:t>Takeaways &amp; where to find everything</a:t>
+            </a:r>
+          </a:p>
+        </p:txBody>
+      </p:sp>
+      <p:sp>
+        <p:nvSpPr>
+          <p:cNvPr id="4" name="TextBox 3"/>
+          <p:cNvSpPr txBox="1"/>
           <p:nvPr/>
-        </p:nvPicPr>
-        <p:blipFill>
-          <a:blip r:embed="rId2"/>
-          <a:stretch>
-            <a:fillRect/>
-          </a:stretch>
-        </p:blipFill>
+        </p:nvSpPr>
         <p:spPr>
           <a:xfrm>
-            <a:off x="365760" y="1005840"/>
-            <a:ext cx="6280045" cy="4572000"/>
-          </a:xfrm>
-          <a:prstGeom prst="rect">
-            <a:avLst/>
-          </a:prstGeom>
-        </p:spPr>
-      </p:pic>
-      <p:sp>
-        <p:nvSpPr>
-          <p:cNvPr id="5" name="TextBox 4"/>
-          <p:cNvSpPr txBox="1"/>
-          <p:nvPr/>
-        </p:nvSpPr>
-        <p:spPr>
-          <a:xfrm>
-            <a:off x="8412480" y="1097280"/>
-            <a:ext cx="3566160" cy="5394960"/>
+            <a:off x="457200" y="1097280"/>
+            <a:ext cx="11430000" cy="5394960"/>
           </a:xfrm>
           <a:prstGeom prst="rect">
             <a:avLst/>
@@ -4796,182 +4987,18 @@
           <a:p>
             <a:pPr>
               <a:spcAft>
-                <a:spcPts val="800"/>
+                <a:spcPts val="700"/>
               </a:spcAft>
-              <a:defRPr sz="1500">
+              <a:defRPr sz="1800">
                 <a:solidFill>
                   <a:srgbClr val="222222"/>
                 </a:solidFill>
               </a:defRPr>
             </a:pPr>
             <a:r>
-              <a:t>• 24 fabric 'colors' = communication channels. We mapped which are used in each microstep.</a:t>
-            </a:r>
-          </a:p>
-          <a:p>
-            <a:pPr>
-              <a:spcAft>
-                <a:spcPts val="800"/>
-              </a:spcAft>
-              <a:defRPr sz="1500">
-                <a:solidFill>
-                  <a:srgbClr val="222222"/>
-                </a:solidFill>
-              </a:defRPr>
-            </a:pPr>
-            <a:r>
-              <a:t>• DECODE uses only 8/24 on a compute core...</a:t>
-            </a:r>
-          </a:p>
-          <a:p>
-            <a:pPr>
-              <a:spcAft>
-                <a:spcPts val="800"/>
-              </a:spcAft>
-              <a:defRPr sz="1500">
-                <a:solidFill>
-                  <a:srgbClr val="222222"/>
-                </a:solidFill>
-              </a:defRPr>
-            </a:pPr>
-            <a:r>
-              <a:t>• ...because it REUSES 5 channels, repainting their routes 6x per layer (Y / X / band = the reduce direction).</a:t>
-            </a:r>
-          </a:p>
-          <a:p>
-            <a:pPr>
-              <a:spcAft>
-                <a:spcPts val="800"/>
-              </a:spcAft>
-              <a:defRPr sz="1500">
-                <a:solidFill>
-                  <a:srgbClr val="222222"/>
-                </a:solidFill>
-              </a:defRPr>
-            </a:pPr>
-            <a:r>
-              <a:t>• Local steps (RoPE, residuals) use no fabric at all.</a:t>
-            </a:r>
-          </a:p>
-        </p:txBody>
-      </p:sp>
-    </p:spTree>
-  </p:cSld>
-  <p:clrMapOvr>
-    <a:masterClrMapping/>
-  </p:clrMapOvr>
-</p:sld>
-</file>
-
-<file path=ppt/slides/slide9.xml><?xml version="1.0" encoding="utf-8"?>
-<p:sld xmlns:a="http://schemas.openxmlformats.org/drawingml/2006/main" xmlns:p="http://schemas.openxmlformats.org/presentationml/2006/main" xmlns:r="http://schemas.openxmlformats.org/officeDocument/2006/relationships">
-  <p:cSld>
-    <p:spTree>
-      <p:nvGrpSpPr>
-        <p:cNvPr id="1" name=""/>
-        <p:cNvGrpSpPr/>
-        <p:nvPr/>
-      </p:nvGrpSpPr>
-      <p:grpSpPr/>
-      <p:sp>
-        <p:nvSpPr>
-          <p:cNvPr id="2" name="Rectangle 1"/>
-          <p:cNvSpPr/>
-          <p:nvPr/>
-        </p:nvSpPr>
-        <p:spPr>
-          <a:xfrm>
-            <a:off x="0" y="0"/>
-            <a:ext cx="12191695" cy="868680"/>
-          </a:xfrm>
-          <a:prstGeom prst="rect">
-            <a:avLst/>
-          </a:prstGeom>
-          <a:solidFill>
-            <a:srgbClr val="1F3A5F"/>
-          </a:solidFill>
-          <a:ln>
-            <a:noFill/>
-          </a:ln>
-        </p:spPr>
-        <p:style>
-          <a:lnRef idx="1">
-            <a:schemeClr val="accent1"/>
-          </a:lnRef>
-          <a:fillRef idx="3">
-            <a:schemeClr val="accent1"/>
-          </a:fillRef>
-          <a:effectRef idx="2">
-            <a:schemeClr val="accent1"/>
-          </a:effectRef>
-          <a:fontRef idx="minor">
-            <a:schemeClr val="lt1"/>
-          </a:fontRef>
-        </p:style>
-        <p:txBody>
-          <a:bodyPr rtlCol="0" anchor="ctr"/>
-          <a:lstStyle/>
-          <a:p>
-            <a:pPr algn="ctr"/>
-          </a:p>
-        </p:txBody>
-      </p:sp>
-      <p:sp>
-        <p:nvSpPr>
-          <p:cNvPr id="3" name="TextBox 2"/>
-          <p:cNvSpPr txBox="1"/>
-          <p:nvPr/>
-        </p:nvSpPr>
-        <p:spPr>
-          <a:xfrm>
-            <a:off x="365760" y="109728"/>
-            <a:ext cx="11430000" cy="685800"/>
-          </a:xfrm>
-          <a:prstGeom prst="rect">
-            <a:avLst/>
-          </a:prstGeom>
-          <a:noFill/>
-        </p:spPr>
-        <p:txBody>
-          <a:bodyPr wrap="square">
-            <a:spAutoFit/>
-          </a:bodyPr>
-          <a:lstStyle/>
-          <a:p>
-            <a:pPr>
-              <a:defRPr sz="2600" b="1">
-                <a:solidFill>
-                  <a:srgbClr val="FFFFFF"/>
-                </a:solidFill>
-              </a:defRPr>
-            </a:pPr>
-            <a:r>
-              <a:t>The decode &lt;-&gt; prefill trade-off</a:t>
-            </a:r>
-          </a:p>
-        </p:txBody>
-      </p:sp>
-      <p:sp>
-        <p:nvSpPr>
-          <p:cNvPr id="4" name="TextBox 3"/>
-          <p:cNvSpPr txBox="1"/>
-          <p:nvPr/>
-        </p:nvSpPr>
-        <p:spPr>
-          <a:xfrm>
-            <a:off x="457200" y="1097280"/>
-            <a:ext cx="5486400" cy="5394960"/>
-          </a:xfrm>
-          <a:prstGeom prst="rect">
-            <a:avLst/>
-          </a:prstGeom>
-          <a:noFill/>
-        </p:spPr>
-        <p:txBody>
-          <a:bodyPr wrap="square">
-            <a:spAutoFit/>
-          </a:bodyPr>
-          <a:lstStyle/>
+              <a:t>• Two scarce per-core resources on the wafer: 48 KB SRAM and 24 colors.</a:t>
+            </a:r>
+          </a:p>
           <a:p>
             <a:pPr>
               <a:spcAft>
@@ -4984,7 +5011,7 @@
               </a:defRPr>
             </a:pPr>
             <a:r>
-              <a:t>• DECODE = color-frugal, reconfiguration-heavy: 8/24 colors; reuses 5 and repaints their routes every step.</a:t>
+              <a:t>• SRAM: code (~half) is the dominant, replicated cost; KV is the residual; max context = 22,784 tokens (measured).</a:t>
             </a:r>
           </a:p>
           <a:p>
@@ -4999,7 +5026,37 @@
               </a:defRPr>
             </a:pPr>
             <a:r>
-              <a:t>• PREFILL = color-hungry, reconfiguration-light: 17/24 colors.</a:t>
+              <a:t>• Colors: decode 8/24 (reconfig-heavy), prefill 17/24 (MeshGEMM-heavy); neither is color-bound.</a:t>
+            </a:r>
+          </a:p>
+          <a:p>
+            <a:pPr>
+              <a:spcAft>
+                <a:spcPts val="700"/>
+              </a:spcAft>
+              <a:defRPr sz="1800">
+                <a:solidFill>
+                  <a:srgbClr val="222222"/>
+                </a:solidFill>
+              </a:defRPr>
+            </a:pPr>
+            <a:r>
+              <a:t>• All analysis is per-role static -&gt; cheap and reproducible.</a:t>
+            </a:r>
+          </a:p>
+          <a:p>
+            <a:pPr>
+              <a:spcAft>
+                <a:spcPts val="700"/>
+              </a:spcAft>
+              <a:defRPr sz="1800">
+                <a:solidFill>
+                  <a:srgbClr val="222222"/>
+                </a:solidFill>
+              </a:defRPr>
+            </a:pPr>
+            <a:r>
+              <a:t>• Traceable: branch  lexu/pe-mem-breakdown   (WaferEngine repo).</a:t>
             </a:r>
           </a:p>
           <a:p>
@@ -5014,96 +5071,22 @@
               </a:defRPr>
             </a:pPr>
             <a:r>
-              <a:t>– Its matmuls use a systolic 'MeshGEMM' with 6 dedicated, statically-routed channels (never repainted mid-matmul).</a:t>
-            </a:r>
-          </a:p>
-          <a:p>
-            <a:pPr>
+              <a:t>– tool + plots: tools/pe_mem_breakdown/   ·   results/{decode,prefill}/</a:t>
+            </a:r>
+          </a:p>
+          <a:p>
+            <a:pPr lvl="1">
               <a:spcAft>
                 <a:spcPts val="700"/>
               </a:spcAft>
-              <a:defRPr sz="1800">
-                <a:solidFill>
-                  <a:srgbClr val="222222"/>
+              <a:defRPr sz="1500">
+                <a:solidFill>
+                  <a:srgbClr val="555555"/>
                 </a:solidFill>
               </a:defRPr>
             </a:pPr>
             <a:r>
-              <a:t>• So the two kernels trade the SAME two resources differently: decode spends route-repaint time to save colors; prefill spends colors to save time.</a:t>
-            </a:r>
-          </a:p>
-          <a:p>
-            <a:pPr>
-              <a:spcAft>
-                <a:spcPts val="700"/>
-              </a:spcAft>
-              <a:defRPr sz="1800">
-                <a:solidFill>
-                  <a:srgbClr val="222222"/>
-                </a:solidFill>
-              </a:defRPr>
-            </a:pPr>
-            <a:r>
-              <a:t>• Both fit comfortably — neither is color-bound today.</a:t>
-            </a:r>
-          </a:p>
-        </p:txBody>
-      </p:sp>
-      <p:pic>
-        <p:nvPicPr>
-          <p:cNvPr id="5" name="Picture 4" descr="prefill_color_usage.png"/>
-          <p:cNvPicPr>
-            <a:picLocks noChangeAspect="1"/>
-          </p:cNvPicPr>
-          <p:nvPr/>
-        </p:nvPicPr>
-        <p:blipFill>
-          <a:blip r:embed="rId2"/>
-          <a:stretch>
-            <a:fillRect/>
-          </a:stretch>
-        </p:blipFill>
-        <p:spPr>
-          <a:xfrm>
-            <a:off x="6126480" y="1143000"/>
-            <a:ext cx="5760720" cy="4294422"/>
-          </a:xfrm>
-          <a:prstGeom prst="rect">
-            <a:avLst/>
-          </a:prstGeom>
-        </p:spPr>
-      </p:pic>
-      <p:sp>
-        <p:nvSpPr>
-          <p:cNvPr id="6" name="TextBox 5"/>
-          <p:cNvSpPr txBox="1"/>
-          <p:nvPr/>
-        </p:nvSpPr>
-        <p:spPr>
-          <a:xfrm>
-            <a:off x="6126480" y="6172200"/>
-            <a:ext cx="5760720" cy="457200"/>
-          </a:xfrm>
-          <a:prstGeom prst="rect">
-            <a:avLst/>
-          </a:prstGeom>
-          <a:noFill/>
-        </p:spPr>
-        <p:txBody>
-          <a:bodyPr wrap="square">
-            <a:spAutoFit/>
-          </a:bodyPr>
-          <a:lstStyle/>
-          <a:p>
-            <a:pPr algn="ctr">
-              <a:defRPr sz="1100" i="1">
-                <a:solidFill>
-                  <a:srgbClr val="555555"/>
-                </a:solidFill>
-              </a:defRPr>
-            </a:pPr>
-            <a:r>
-              <a:t>Prefill: 17/24 colors (MeshGEMM-heavy)</a:t>
+              <a:t>– key commits: 33ecf27 (heatmaps), 023cf1d (seq-len probe), 0869200 (color map).</a:t>
             </a:r>
           </a:p>
         </p:txBody>

--- a/projects/WaferEngine/docs/2026-06-28/wse_per_pe_resource_analysis.pptx
+++ b/projects/WaferEngine/docs/2026-06-28/wse_per_pe_resource_analysis.pptx
@@ -10,6 +10,7 @@
     <p:sldId id="258" r:id="rId4"/>
     <p:sldId id="259" r:id="rId5"/>
     <p:sldId id="260" r:id="rId6"/>
+    <p:sldId id="266" r:id="rId15"/>
     <p:sldId id="262" r:id="rId7"/>
     <p:sldId id="263" r:id="rId8"/>
     <p:sldId id="264" r:id="rId9"/>
@@ -3185,6 +3186,288 @@
             </a:pPr>
             <a:r>
               <a:t>qwen3-1.7B on a real Cerebras WSE-3 (CS-3)  ·  memory &amp; fabric-color analysis  ·  2026-06-28</a:t>
+            </a:r>
+          </a:p>
+        </p:txBody>
+      </p:sp>
+    </p:spTree>
+  </p:cSld>
+  <p:clrMapOvr>
+    <a:masterClrMapping/>
+  </p:clrMapOvr>
+</p:sld>
+</file>
+
+<file path=ppt/slides/slide10.xml><?xml version="1.0" encoding="utf-8"?>
+<p:sld xmlns:a="http://schemas.openxmlformats.org/drawingml/2006/main" xmlns:p="http://schemas.openxmlformats.org/presentationml/2006/main" xmlns:r="http://schemas.openxmlformats.org/officeDocument/2006/relationships">
+  <p:cSld>
+    <p:spTree>
+      <p:nvGrpSpPr>
+        <p:cNvPr id="1" name=""/>
+        <p:cNvGrpSpPr/>
+        <p:nvPr/>
+      </p:nvGrpSpPr>
+      <p:grpSpPr/>
+      <p:sp>
+        <p:nvSpPr>
+          <p:cNvPr id="2" name="Rectangle 1"/>
+          <p:cNvSpPr/>
+          <p:nvPr/>
+        </p:nvSpPr>
+        <p:spPr>
+          <a:xfrm>
+            <a:off x="0" y="0"/>
+            <a:ext cx="12192000" cy="868680"/>
+          </a:xfrm>
+          <a:prstGeom prst="rect">
+            <a:avLst/>
+          </a:prstGeom>
+          <a:solidFill>
+            <a:srgbClr val="1F3A5F"/>
+          </a:solidFill>
+          <a:ln>
+            <a:noFill/>
+          </a:ln>
+        </p:spPr>
+        <p:style>
+          <a:lnRef idx="1">
+            <a:schemeClr val="accent1"/>
+          </a:lnRef>
+          <a:fillRef idx="3">
+            <a:schemeClr val="accent1"/>
+          </a:fillRef>
+          <a:effectRef idx="2">
+            <a:schemeClr val="accent1"/>
+          </a:effectRef>
+          <a:fontRef idx="minor">
+            <a:schemeClr val="lt1"/>
+          </a:fontRef>
+        </p:style>
+        <p:txBody>
+          <a:bodyPr rtlCol="0" anchor="ctr"/>
+          <a:lstStyle/>
+          <a:p>
+            <a:pPr algn="ctr"/>
+          </a:p>
+        </p:txBody>
+      </p:sp>
+      <p:sp>
+        <p:nvSpPr>
+          <p:cNvPr id="3" name="TextBox 2"/>
+          <p:cNvSpPr txBox="1"/>
+          <p:nvPr/>
+        </p:nvSpPr>
+        <p:spPr>
+          <a:xfrm>
+            <a:off x="365760" y="109728"/>
+            <a:ext cx="11430000" cy="685800"/>
+          </a:xfrm>
+          <a:prstGeom prst="rect">
+            <a:avLst/>
+          </a:prstGeom>
+          <a:noFill/>
+        </p:spPr>
+        <p:txBody>
+          <a:bodyPr wrap="square">
+            <a:spAutoFit/>
+          </a:bodyPr>
+          <a:lstStyle/>
+          <a:p>
+            <a:pPr>
+              <a:defRPr sz="2600" b="1">
+                <a:solidFill>
+                  <a:srgbClr val="FFFFFF"/>
+                </a:solidFill>
+              </a:defRPr>
+            </a:pPr>
+            <a:r>
+              <a:t>Prefill: memory breakdown + op layout</a:t>
+            </a:r>
+          </a:p>
+        </p:txBody>
+      </p:sp>
+      <p:pic>
+        <p:nvPicPr>
+          <p:cNvPr id="4" name="Picture 3" descr="prefill_stacked.png"/>
+          <p:cNvPicPr>
+            <a:picLocks noChangeAspect="1"/>
+          </p:cNvPicPr>
+          <p:nvPr/>
+        </p:nvPicPr>
+        <p:blipFill>
+          <a:blip r:embed="rId2"/>
+          <a:stretch>
+            <a:fillRect/>
+          </a:stretch>
+        </p:blipFill>
+        <p:spPr>
+          <a:xfrm>
+            <a:off x="574765" y="1051560"/>
+            <a:ext cx="5159829" cy="3611880"/>
+          </a:xfrm>
+          <a:prstGeom prst="rect">
+            <a:avLst/>
+          </a:prstGeom>
+        </p:spPr>
+      </p:pic>
+      <p:sp>
+        <p:nvSpPr>
+          <p:cNvPr id="5" name="TextBox 4"/>
+          <p:cNvSpPr txBox="1"/>
+          <p:nvPr/>
+        </p:nvSpPr>
+        <p:spPr>
+          <a:xfrm>
+            <a:off x="365760" y="4736592"/>
+            <a:ext cx="5577840" cy="365760"/>
+          </a:xfrm>
+          <a:prstGeom prst="rect">
+            <a:avLst/>
+          </a:prstGeom>
+          <a:noFill/>
+        </p:spPr>
+        <p:txBody>
+          <a:bodyPr wrap="none">
+            <a:spAutoFit/>
+          </a:bodyPr>
+          <a:lstStyle/>
+          <a:p>
+            <a:pPr algn="ctr">
+              <a:defRPr sz="1200" i="1">
+                <a:solidFill>
+                  <a:srgbClr val="555555"/>
+                </a:solidFill>
+              </a:defRPr>
+            </a:pPr>
+            <a:r>
+              <a:t>Per-role SRAM breakdown (48 KB ceiling)</a:t>
+            </a:r>
+          </a:p>
+        </p:txBody>
+      </p:sp>
+      <p:pic>
+        <p:nvPicPr>
+          <p:cNvPr id="6" name="Picture 5" descr="prefill_placement_map.png"/>
+          <p:cNvPicPr>
+            <a:picLocks noChangeAspect="1"/>
+          </p:cNvPicPr>
+          <p:nvPr/>
+        </p:nvPicPr>
+        <p:blipFill>
+          <a:blip r:embed="rId3"/>
+          <a:stretch>
+            <a:fillRect/>
+          </a:stretch>
+        </p:blipFill>
+        <p:spPr>
+          <a:xfrm>
+            <a:off x="6613310" y="1051560"/>
+            <a:ext cx="4841923" cy="3611880"/>
+          </a:xfrm>
+          <a:prstGeom prst="rect">
+            <a:avLst/>
+          </a:prstGeom>
+        </p:spPr>
+      </p:pic>
+      <p:sp>
+        <p:nvSpPr>
+          <p:cNvPr id="7" name="TextBox 6"/>
+          <p:cNvSpPr txBox="1"/>
+          <p:nvPr/>
+        </p:nvSpPr>
+        <p:spPr>
+          <a:xfrm>
+            <a:off x="6245352" y="4736592"/>
+            <a:ext cx="5577840" cy="365760"/>
+          </a:xfrm>
+          <a:prstGeom prst="rect">
+            <a:avLst/>
+          </a:prstGeom>
+          <a:noFill/>
+        </p:spPr>
+        <p:txBody>
+          <a:bodyPr wrap="none">
+            <a:spAutoFit/>
+          </a:bodyPr>
+          <a:lstStyle/>
+          <a:p>
+            <a:pPr algn="ctr">
+              <a:defRPr sz="1200" i="1">
+                <a:solidFill>
+                  <a:srgbClr val="555555"/>
+                </a:solidFill>
+              </a:defRPr>
+            </a:pPr>
+            <a:r>
+              <a:t>PE block placement: 2x2 prefill blocks + HT band</a:t>
+            </a:r>
+          </a:p>
+        </p:txBody>
+      </p:sp>
+      <p:sp>
+        <p:nvSpPr>
+          <p:cNvPr id="8" name="TextBox 7"/>
+          <p:cNvSpPr txBox="1"/>
+          <p:nvPr/>
+        </p:nvSpPr>
+        <p:spPr>
+          <a:xfrm>
+            <a:off x="457200" y="5166360"/>
+            <a:ext cx="11338560" cy="1554480"/>
+          </a:xfrm>
+          <a:prstGeom prst="rect">
+            <a:avLst/>
+          </a:prstGeom>
+          <a:noFill/>
+        </p:spPr>
+        <p:txBody>
+          <a:bodyPr wrap="square">
+            <a:spAutoFit/>
+          </a:bodyPr>
+          <a:lstStyle/>
+          <a:p>
+            <a:pPr>
+              <a:spcAft>
+                <a:spcPts val="500"/>
+              </a:spcAft>
+              <a:defRPr sz="1300">
+                <a:solidFill>
+                  <a:srgbClr val="222222"/>
+                </a:solidFill>
+              </a:defRPr>
+            </a:pPr>
+            <a:r>
+              <a:t>• Same shape as decode: ~23 KB CODE + ~11 KB weights per compute PE — but runs TIGHTER, ~82% full (~8 KB free vs decode's ~11 KB), because prefill carries the causal attention mask + larger MeshGEMM comm buffers.</a:t>
+            </a:r>
+          </a:p>
+          <a:p>
+            <a:pPr>
+              <a:spcAft>
+                <a:spcPts val="500"/>
+              </a:spcAft>
+              <a:defRPr sz="1300">
+                <a:solidFill>
+                  <a:srgbClr val="222222"/>
+                </a:solidFill>
+              </a:defRPr>
+            </a:pPr>
+            <a:r>
+              <a:t>• Op layout: ONE prefill region split into 2x2 logical blocks (vs decode's two stacked block-rows); same thin HT band — ht_head embedding (~38 KB, weight-bound) + ht_tail lm_head.</a:t>
+            </a:r>
+          </a:p>
+          <a:p>
+            <a:pPr>
+              <a:spcAft>
+                <a:spcPts val="500"/>
+              </a:spcAft>
+              <a:defRPr sz="1300">
+                <a:solidFill>
+                  <a:srgbClr val="222222"/>
+                </a:solidFill>
+              </a:defRPr>
+            </a:pPr>
+            <a:r>
+              <a:t>• Same disaggregated-memory tax: the transformer-layer code is replicated on every compute core; KV is the squeezed residual.</a:t>
             </a:r>
           </a:p>
         </p:txBody>

--- a/projects/WaferEngine/docs/2026-06-28/wse_per_pe_resource_analysis.pptx
+++ b/projects/WaferEngine/docs/2026-06-28/wse_per_pe_resource_analysis.pptx
@@ -10,11 +10,11 @@
     <p:sldId id="258" r:id="rId4"/>
     <p:sldId id="259" r:id="rId5"/>
     <p:sldId id="260" r:id="rId6"/>
-    <p:sldId id="266" r:id="rId15"/>
-    <p:sldId id="262" r:id="rId7"/>
-    <p:sldId id="263" r:id="rId8"/>
-    <p:sldId id="264" r:id="rId9"/>
-    <p:sldId id="265" r:id="rId10"/>
+    <p:sldId id="266" r:id="rId7"/>
+    <p:sldId id="262" r:id="rId8"/>
+    <p:sldId id="263" r:id="rId9"/>
+    <p:sldId id="264" r:id="rId10"/>
+    <p:sldId id="265" r:id="rId11"/>
   </p:sldIdLst>
   <p:sldSz cx="12192000" cy="6858000"/>
   <p:notesSz cx="6858000" cy="9144000"/>
@@ -3199,7 +3199,7 @@
 </file>
 
 <file path=ppt/slides/slide10.xml><?xml version="1.0" encoding="utf-8"?>
-<p:sld xmlns:a="http://schemas.openxmlformats.org/drawingml/2006/main" xmlns:p="http://schemas.openxmlformats.org/presentationml/2006/main" xmlns:r="http://schemas.openxmlformats.org/officeDocument/2006/relationships">
+<p:sld xmlns:a="http://schemas.openxmlformats.org/drawingml/2006/main" xmlns:r="http://schemas.openxmlformats.org/officeDocument/2006/relationships" xmlns:p="http://schemas.openxmlformats.org/presentationml/2006/main">
   <p:cSld>
     <p:spTree>
       <p:nvGrpSpPr>
@@ -3207,7 +3207,14 @@
         <p:cNvGrpSpPr/>
         <p:nvPr/>
       </p:nvGrpSpPr>
-      <p:grpSpPr/>
+      <p:grpSpPr>
+        <a:xfrm>
+          <a:off x="0" y="0"/>
+          <a:ext cx="0" cy="0"/>
+          <a:chOff x="0" y="0"/>
+          <a:chExt cx="0" cy="0"/>
+        </a:xfrm>
+      </p:grpSpPr>
       <p:sp>
         <p:nvSpPr>
           <p:cNvPr id="2" name="Rectangle 1"/>
@@ -3217,7 +3224,7 @@
         <p:spPr>
           <a:xfrm>
             <a:off x="0" y="0"/>
-            <a:ext cx="12192000" cy="868680"/>
+            <a:ext cx="12191695" cy="868680"/>
           </a:xfrm>
           <a:prstGeom prst="rect">
             <a:avLst/>
@@ -3248,6 +3255,7 @@
           <a:lstStyle/>
           <a:p>
             <a:pPr algn="ctr"/>
+            <a:endParaRPr/>
           </a:p>
         </p:txBody>
       </p:sp>
@@ -3281,45 +3289,21 @@
               </a:defRPr>
             </a:pPr>
             <a:r>
-              <a:t>Prefill: memory breakdown + op layout</a:t>
-            </a:r>
-          </a:p>
-        </p:txBody>
-      </p:sp>
-      <p:pic>
-        <p:nvPicPr>
-          <p:cNvPr id="4" name="Picture 3" descr="prefill_stacked.png"/>
-          <p:cNvPicPr>
-            <a:picLocks noChangeAspect="1"/>
-          </p:cNvPicPr>
-          <p:nvPr/>
-        </p:nvPicPr>
-        <p:blipFill>
-          <a:blip r:embed="rId2"/>
-          <a:stretch>
-            <a:fillRect/>
-          </a:stretch>
-        </p:blipFill>
-        <p:spPr>
-          <a:xfrm>
-            <a:off x="574765" y="1051560"/>
-            <a:ext cx="5159829" cy="3611880"/>
-          </a:xfrm>
-          <a:prstGeom prst="rect">
-            <a:avLst/>
-          </a:prstGeom>
-        </p:spPr>
-      </p:pic>
-      <p:sp>
-        <p:nvSpPr>
-          <p:cNvPr id="5" name="TextBox 4"/>
+              <a:t>Takeaways &amp; where to find everything</a:t>
+            </a:r>
+          </a:p>
+        </p:txBody>
+      </p:sp>
+      <p:sp>
+        <p:nvSpPr>
+          <p:cNvPr id="4" name="TextBox 3"/>
           <p:cNvSpPr txBox="1"/>
           <p:nvPr/>
         </p:nvSpPr>
         <p:spPr>
           <a:xfrm>
-            <a:off x="365760" y="4736592"/>
-            <a:ext cx="5577840" cy="365760"/>
+            <a:off x="457200" y="1097280"/>
+            <a:ext cx="11430000" cy="5365571"/>
           </a:xfrm>
           <a:prstGeom prst="rect">
             <a:avLst/>
@@ -3327,148 +3311,313 @@
           <a:noFill/>
         </p:spPr>
         <p:txBody>
-          <a:bodyPr wrap="none">
-            <a:spAutoFit/>
-          </a:bodyPr>
-          <a:lstStyle/>
-          <a:p>
-            <a:pPr algn="ctr">
-              <a:defRPr sz="1200" i="1">
-                <a:solidFill>
-                  <a:srgbClr val="555555"/>
-                </a:solidFill>
-              </a:defRPr>
-            </a:pPr>
-            <a:r>
-              <a:t>Per-role SRAM breakdown (48 KB ceiling)</a:t>
-            </a:r>
-          </a:p>
-        </p:txBody>
-      </p:sp>
-      <p:pic>
-        <p:nvPicPr>
-          <p:cNvPr id="6" name="Picture 5" descr="prefill_placement_map.png"/>
-          <p:cNvPicPr>
-            <a:picLocks noChangeAspect="1"/>
-          </p:cNvPicPr>
-          <p:nvPr/>
-        </p:nvPicPr>
-        <p:blipFill>
-          <a:blip r:embed="rId3"/>
-          <a:stretch>
-            <a:fillRect/>
-          </a:stretch>
-        </p:blipFill>
-        <p:spPr>
-          <a:xfrm>
-            <a:off x="6613310" y="1051560"/>
-            <a:ext cx="4841923" cy="3611880"/>
-          </a:xfrm>
-          <a:prstGeom prst="rect">
-            <a:avLst/>
-          </a:prstGeom>
-        </p:spPr>
-      </p:pic>
-      <p:sp>
-        <p:nvSpPr>
-          <p:cNvPr id="7" name="TextBox 6"/>
-          <p:cNvSpPr txBox="1"/>
-          <p:nvPr/>
-        </p:nvSpPr>
-        <p:spPr>
-          <a:xfrm>
-            <a:off x="6245352" y="4736592"/>
-            <a:ext cx="5577840" cy="365760"/>
-          </a:xfrm>
-          <a:prstGeom prst="rect">
-            <a:avLst/>
-          </a:prstGeom>
-          <a:noFill/>
-        </p:spPr>
-        <p:txBody>
-          <a:bodyPr wrap="none">
-            <a:spAutoFit/>
-          </a:bodyPr>
-          <a:lstStyle/>
-          <a:p>
-            <a:pPr algn="ctr">
-              <a:defRPr sz="1200" i="1">
-                <a:solidFill>
-                  <a:srgbClr val="555555"/>
-                </a:solidFill>
-              </a:defRPr>
-            </a:pPr>
-            <a:r>
-              <a:t>PE block placement: 2x2 prefill blocks + HT band</a:t>
-            </a:r>
-          </a:p>
-        </p:txBody>
-      </p:sp>
-      <p:sp>
-        <p:nvSpPr>
-          <p:cNvPr id="8" name="TextBox 7"/>
-          <p:cNvSpPr txBox="1"/>
-          <p:nvPr/>
-        </p:nvSpPr>
-        <p:spPr>
-          <a:xfrm>
-            <a:off x="457200" y="5166360"/>
-            <a:ext cx="11338560" cy="1554480"/>
-          </a:xfrm>
-          <a:prstGeom prst="rect">
-            <a:avLst/>
-          </a:prstGeom>
-          <a:noFill/>
-        </p:spPr>
-        <p:txBody>
           <a:bodyPr wrap="square">
             <a:spAutoFit/>
           </a:bodyPr>
           <a:lstStyle/>
           <a:p>
-            <a:pPr>
+            <a:pPr marL="285750" indent="-285750">
               <a:spcAft>
-                <a:spcPts val="500"/>
+                <a:spcPts val="700"/>
               </a:spcAft>
-              <a:defRPr sz="1300">
+              <a:buFont typeface="Arial" panose="020B0604020202020204" pitchFamily="34" charset="0"/>
+              <a:buChar char="•"/>
+              <a:defRPr sz="1800">
                 <a:solidFill>
                   <a:srgbClr val="222222"/>
                 </a:solidFill>
               </a:defRPr>
             </a:pPr>
             <a:r>
-              <a:t>• Same shape as decode: ~23 KB CODE + ~11 KB weights per compute PE — but runs TIGHTER, ~82% full (~8 KB free vs decode's ~11 KB), because prefill carries the causal attention mask + larger MeshGEMM comm buffers.</a:t>
-            </a:r>
-          </a:p>
-          <a:p>
-            <a:pPr>
+              <a:rPr lang="en-US" dirty="0"/>
+              <a:t>Observation</a:t>
+            </a:r>
+          </a:p>
+          <a:p>
+            <a:pPr marL="742950" lvl="1" indent="-285750">
               <a:spcAft>
-                <a:spcPts val="500"/>
+                <a:spcPts val="700"/>
               </a:spcAft>
-              <a:defRPr sz="1300">
+              <a:buFont typeface="Arial" panose="020B0604020202020204" pitchFamily="34" charset="0"/>
+              <a:buChar char="•"/>
+              <a:defRPr sz="1800">
                 <a:solidFill>
                   <a:srgbClr val="222222"/>
                 </a:solidFill>
               </a:defRPr>
             </a:pPr>
             <a:r>
-              <a:t>• Op layout: ONE prefill region split into 2x2 logical blocks (vs decode's two stacked block-rows); same thin HT band — ht_head embedding (~38 KB, weight-bound) + ht_tail lm_head.</a:t>
-            </a:r>
-          </a:p>
-          <a:p>
-            <a:pPr>
+              <a:rPr lang="en-US" dirty="0"/>
+              <a:t>Code/Program binary becomes major resource bottleneck</a:t>
+            </a:r>
+          </a:p>
+          <a:p>
+            <a:pPr marL="1200150" lvl="2" indent="-285750">
               <a:spcAft>
-                <a:spcPts val="500"/>
+                <a:spcPts val="700"/>
               </a:spcAft>
-              <a:defRPr sz="1300">
+              <a:buFont typeface="Arial" panose="020B0604020202020204" pitchFamily="34" charset="0"/>
+              <a:buChar char="•"/>
+              <a:defRPr sz="1800">
                 <a:solidFill>
                   <a:srgbClr val="222222"/>
                 </a:solidFill>
               </a:defRPr>
             </a:pPr>
             <a:r>
-              <a:t>• Same disaggregated-memory tax: the transformer-layer code is replicated on every compute core; KV is the squeezed residual.</a:t>
-            </a:r>
+              <a:rPr lang="en-US" dirty="0"/>
+              <a:t>Shared memory for code/program + dynamic loading</a:t>
+            </a:r>
+          </a:p>
+          <a:p>
+            <a:pPr marL="1657350" lvl="3" indent="-285750">
+              <a:spcAft>
+                <a:spcPts val="700"/>
+              </a:spcAft>
+              <a:buFont typeface="Arial" panose="020B0604020202020204" pitchFamily="34" charset="0"/>
+              <a:buChar char="•"/>
+              <a:defRPr sz="1800">
+                <a:solidFill>
+                  <a:srgbClr val="222222"/>
+                </a:solidFill>
+              </a:defRPr>
+            </a:pPr>
+            <a:r>
+              <a:rPr lang="en-US" dirty="0"/>
+              <a:t>Ship function/compute to parameters</a:t>
+            </a:r>
+          </a:p>
+          <a:p>
+            <a:pPr marL="1200150" lvl="2" indent="-285750">
+              <a:spcAft>
+                <a:spcPts val="700"/>
+              </a:spcAft>
+              <a:buFont typeface="Arial" panose="020B0604020202020204" pitchFamily="34" charset="0"/>
+              <a:buChar char="•"/>
+              <a:defRPr sz="1800">
+                <a:solidFill>
+                  <a:srgbClr val="222222"/>
+                </a:solidFill>
+              </a:defRPr>
+            </a:pPr>
+            <a:r>
+              <a:rPr lang="en-US" dirty="0"/>
+              <a:t>Disaggregated operator placement/True dataflow model</a:t>
+            </a:r>
+          </a:p>
+          <a:p>
+            <a:pPr marL="1657350" lvl="3" indent="-285750">
+              <a:spcAft>
+                <a:spcPts val="700"/>
+              </a:spcAft>
+              <a:buFont typeface="Arial" panose="020B0604020202020204" pitchFamily="34" charset="0"/>
+              <a:buChar char="•"/>
+              <a:defRPr sz="1800">
+                <a:solidFill>
+                  <a:srgbClr val="222222"/>
+                </a:solidFill>
+              </a:defRPr>
+            </a:pPr>
+            <a:r>
+              <a:rPr lang="en-US" dirty="0"/>
+              <a:t>Probably needs storage space (intermediate PEs) to absorb bubbles?</a:t>
+            </a:r>
+          </a:p>
+          <a:p>
+            <a:pPr marL="742950" lvl="1" indent="-285750">
+              <a:spcAft>
+                <a:spcPts val="700"/>
+              </a:spcAft>
+              <a:buFont typeface="Arial" panose="020B0604020202020204" pitchFamily="34" charset="0"/>
+              <a:buChar char="•"/>
+              <a:defRPr sz="1800">
+                <a:solidFill>
+                  <a:srgbClr val="222222"/>
+                </a:solidFill>
+              </a:defRPr>
+            </a:pPr>
+            <a:r>
+              <a:rPr lang="en-US" dirty="0"/>
+              <a:t>The position of optimize for KV cache needs to be evaluated</a:t>
+            </a:r>
+          </a:p>
+          <a:p>
+            <a:pPr marL="1200150" lvl="2" indent="-285750">
+              <a:spcAft>
+                <a:spcPts val="700"/>
+              </a:spcAft>
+              <a:buFont typeface="Arial" panose="020B0604020202020204" pitchFamily="34" charset="0"/>
+              <a:buChar char="•"/>
+              <a:defRPr sz="1800">
+                <a:solidFill>
+                  <a:srgbClr val="222222"/>
+                </a:solidFill>
+              </a:defRPr>
+            </a:pPr>
+            <a:r>
+              <a:rPr lang="en-US" dirty="0"/>
+              <a:t>Store KV in limited SRAM vs. ultra-fast recompute</a:t>
+            </a:r>
+          </a:p>
+          <a:p>
+            <a:pPr marL="1200150" lvl="2" indent="-285750">
+              <a:spcAft>
+                <a:spcPts val="700"/>
+              </a:spcAft>
+              <a:buFont typeface="Arial" panose="020B0604020202020204" pitchFamily="34" charset="0"/>
+              <a:buChar char="•"/>
+              <a:defRPr sz="1800">
+                <a:solidFill>
+                  <a:srgbClr val="222222"/>
+                </a:solidFill>
+              </a:defRPr>
+            </a:pPr>
+            <a:r>
+              <a:rPr lang="en-US" dirty="0"/>
+              <a:t>Probably still a must if we build a service and support for many requests (needs </a:t>
+            </a:r>
+            <a:r>
+              <a:rPr lang="en-US"/>
+              <a:t>KV re-use)</a:t>
+            </a:r>
+          </a:p>
+          <a:p>
+            <a:pPr marL="1200150" lvl="2" indent="-285750">
+              <a:spcAft>
+                <a:spcPts val="700"/>
+              </a:spcAft>
+              <a:buFont typeface="Arial" panose="020B0604020202020204" pitchFamily="34" charset="0"/>
+              <a:buChar char="•"/>
+              <a:defRPr sz="1800">
+                <a:solidFill>
+                  <a:srgbClr val="222222"/>
+                </a:solidFill>
+              </a:defRPr>
+            </a:pPr>
+            <a:endParaRPr lang="en-US" dirty="0"/>
+          </a:p>
+          <a:p>
+            <a:pPr marL="285750" indent="-285750">
+              <a:spcAft>
+                <a:spcPts val="700"/>
+              </a:spcAft>
+              <a:buFont typeface="Arial" panose="020B0604020202020204" pitchFamily="34" charset="0"/>
+              <a:buChar char="•"/>
+              <a:defRPr sz="1800">
+                <a:solidFill>
+                  <a:srgbClr val="222222"/>
+                </a:solidFill>
+              </a:defRPr>
+            </a:pPr>
+            <a:endParaRPr lang="en-US" dirty="0"/>
+          </a:p>
+          <a:p>
+            <a:pPr marL="285750" indent="-285750">
+              <a:spcAft>
+                <a:spcPts val="700"/>
+              </a:spcAft>
+              <a:buFont typeface="Arial" panose="020B0604020202020204" pitchFamily="34" charset="0"/>
+              <a:buChar char="•"/>
+              <a:defRPr sz="1800">
+                <a:solidFill>
+                  <a:srgbClr val="222222"/>
+                </a:solidFill>
+              </a:defRPr>
+            </a:pPr>
+            <a:r>
+              <a:rPr dirty="0"/>
+              <a:t>Traceable: branch  </a:t>
+            </a:r>
+            <a:r>
+              <a:rPr dirty="0" err="1"/>
+              <a:t>lexu</a:t>
+            </a:r>
+            <a:r>
+              <a:rPr dirty="0"/>
+              <a:t>/pe-mem-breakdown   (</a:t>
+            </a:r>
+            <a:r>
+              <a:rPr dirty="0" err="1"/>
+              <a:t>WaferEngine</a:t>
+            </a:r>
+            <a:r>
+              <a:rPr dirty="0"/>
+              <a:t> repo).</a:t>
+            </a:r>
+          </a:p>
+          <a:p>
+            <a:pPr marL="742950" lvl="1" indent="-285750">
+              <a:spcAft>
+                <a:spcPts val="700"/>
+              </a:spcAft>
+              <a:buFont typeface="Arial" panose="020B0604020202020204" pitchFamily="34" charset="0"/>
+              <a:buChar char="•"/>
+              <a:defRPr sz="1500">
+                <a:solidFill>
+                  <a:srgbClr val="555555"/>
+                </a:solidFill>
+              </a:defRPr>
+            </a:pPr>
+            <a:r>
+              <a:rPr dirty="0"/>
+              <a:t>tool + plots: tools/</a:t>
+            </a:r>
+            <a:r>
+              <a:rPr dirty="0" err="1"/>
+              <a:t>pe_mem_breakdown</a:t>
+            </a:r>
+            <a:r>
+              <a:rPr dirty="0"/>
+              <a:t>/   ·   results/{</a:t>
+            </a:r>
+            <a:r>
+              <a:rPr dirty="0" err="1"/>
+              <a:t>decode,prefill</a:t>
+            </a:r>
+            <a:r>
+              <a:rPr dirty="0"/>
+              <a:t>}/</a:t>
+            </a:r>
+          </a:p>
+          <a:p>
+            <a:pPr marL="742950" lvl="1" indent="-285750">
+              <a:spcAft>
+                <a:spcPts val="700"/>
+              </a:spcAft>
+              <a:buFont typeface="Arial" panose="020B0604020202020204" pitchFamily="34" charset="0"/>
+              <a:buChar char="•"/>
+              <a:defRPr sz="1500">
+                <a:solidFill>
+                  <a:srgbClr val="555555"/>
+                </a:solidFill>
+              </a:defRPr>
+            </a:pPr>
+            <a:r>
+              <a:rPr dirty="0"/>
+              <a:t>key commits: 33ecf27 (heatmaps), 023cf1d (seq-</a:t>
+            </a:r>
+            <a:r>
+              <a:rPr dirty="0" err="1"/>
+              <a:t>len</a:t>
+            </a:r>
+            <a:r>
+              <a:rPr dirty="0"/>
+              <a:t> probe), 0869200 (color map).</a:t>
+            </a:r>
+            <a:endParaRPr lang="en-US" dirty="0"/>
+          </a:p>
+          <a:p>
+            <a:pPr lvl="1">
+              <a:spcAft>
+                <a:spcPts val="700"/>
+              </a:spcAft>
+              <a:defRPr sz="1500">
+                <a:solidFill>
+                  <a:srgbClr val="555555"/>
+                </a:solidFill>
+              </a:defRPr>
+            </a:pPr>
+            <a:endParaRPr dirty="0"/>
           </a:p>
         </p:txBody>
       </p:sp>
@@ -4487,7 +4636,7 @@
         <p:spPr>
           <a:xfrm>
             <a:off x="0" y="0"/>
-            <a:ext cx="12191695" cy="868680"/>
+            <a:ext cx="12192000" cy="868680"/>
           </a:xfrm>
           <a:prstGeom prst="rect">
             <a:avLst/>
@@ -4552,21 +4701,45 @@
               </a:defRPr>
             </a:pPr>
             <a:r>
-              <a:t>Finding 2: max context = 22,784 tokens (44x the default)</a:t>
-            </a:r>
-          </a:p>
-        </p:txBody>
-      </p:sp>
-      <p:sp>
-        <p:nvSpPr>
-          <p:cNvPr id="4" name="TextBox 3"/>
+              <a:t>Prefill: memory breakdown + op layout</a:t>
+            </a:r>
+          </a:p>
+        </p:txBody>
+      </p:sp>
+      <p:pic>
+        <p:nvPicPr>
+          <p:cNvPr id="4" name="Picture 3" descr="prefill_stacked.png"/>
+          <p:cNvPicPr>
+            <a:picLocks noChangeAspect="1"/>
+          </p:cNvPicPr>
+          <p:nvPr/>
+        </p:nvPicPr>
+        <p:blipFill>
+          <a:blip r:embed="rId2"/>
+          <a:stretch>
+            <a:fillRect/>
+          </a:stretch>
+        </p:blipFill>
+        <p:spPr>
+          <a:xfrm>
+            <a:off x="574765" y="1051560"/>
+            <a:ext cx="5159829" cy="3611880"/>
+          </a:xfrm>
+          <a:prstGeom prst="rect">
+            <a:avLst/>
+          </a:prstGeom>
+        </p:spPr>
+      </p:pic>
+      <p:sp>
+        <p:nvSpPr>
+          <p:cNvPr id="5" name="TextBox 4"/>
           <p:cNvSpPr txBox="1"/>
           <p:nvPr/>
         </p:nvSpPr>
         <p:spPr>
           <a:xfrm>
-            <a:off x="457200" y="1097280"/>
-            <a:ext cx="11430000" cy="5394960"/>
+            <a:off x="365760" y="4736592"/>
+            <a:ext cx="5577840" cy="365760"/>
           </a:xfrm>
           <a:prstGeom prst="rect">
             <a:avLst/>
@@ -4574,6 +4747,100 @@
           <a:noFill/>
         </p:spPr>
         <p:txBody>
+          <a:bodyPr wrap="none">
+            <a:spAutoFit/>
+          </a:bodyPr>
+          <a:lstStyle/>
+          <a:p>
+            <a:pPr algn="ctr">
+              <a:defRPr sz="1200" i="1">
+                <a:solidFill>
+                  <a:srgbClr val="555555"/>
+                </a:solidFill>
+              </a:defRPr>
+            </a:pPr>
+            <a:r>
+              <a:t>Per-role SRAM breakdown (48 KB ceiling)</a:t>
+            </a:r>
+          </a:p>
+        </p:txBody>
+      </p:sp>
+      <p:pic>
+        <p:nvPicPr>
+          <p:cNvPr id="6" name="Picture 5" descr="prefill_placement_map.png"/>
+          <p:cNvPicPr>
+            <a:picLocks noChangeAspect="1"/>
+          </p:cNvPicPr>
+          <p:nvPr/>
+        </p:nvPicPr>
+        <p:blipFill>
+          <a:blip r:embed="rId3"/>
+          <a:stretch>
+            <a:fillRect/>
+          </a:stretch>
+        </p:blipFill>
+        <p:spPr>
+          <a:xfrm>
+            <a:off x="6613310" y="1051560"/>
+            <a:ext cx="4841923" cy="3611880"/>
+          </a:xfrm>
+          <a:prstGeom prst="rect">
+            <a:avLst/>
+          </a:prstGeom>
+        </p:spPr>
+      </p:pic>
+      <p:sp>
+        <p:nvSpPr>
+          <p:cNvPr id="7" name="TextBox 6"/>
+          <p:cNvSpPr txBox="1"/>
+          <p:nvPr/>
+        </p:nvSpPr>
+        <p:spPr>
+          <a:xfrm>
+            <a:off x="6245352" y="4736592"/>
+            <a:ext cx="5577840" cy="365760"/>
+          </a:xfrm>
+          <a:prstGeom prst="rect">
+            <a:avLst/>
+          </a:prstGeom>
+          <a:noFill/>
+        </p:spPr>
+        <p:txBody>
+          <a:bodyPr wrap="none">
+            <a:spAutoFit/>
+          </a:bodyPr>
+          <a:lstStyle/>
+          <a:p>
+            <a:pPr algn="ctr">
+              <a:defRPr sz="1200" i="1">
+                <a:solidFill>
+                  <a:srgbClr val="555555"/>
+                </a:solidFill>
+              </a:defRPr>
+            </a:pPr>
+            <a:r>
+              <a:t>PE block placement: 2x2 prefill blocks + HT band</a:t>
+            </a:r>
+          </a:p>
+        </p:txBody>
+      </p:sp>
+      <p:sp>
+        <p:nvSpPr>
+          <p:cNvPr id="8" name="TextBox 7"/>
+          <p:cNvSpPr txBox="1"/>
+          <p:nvPr/>
+        </p:nvSpPr>
+        <p:spPr>
+          <a:xfrm>
+            <a:off x="457200" y="5166360"/>
+            <a:ext cx="11338560" cy="1554480"/>
+          </a:xfrm>
+          <a:prstGeom prst="rect">
+            <a:avLst/>
+          </a:prstGeom>
+          <a:noFill/>
+        </p:spPr>
+        <p:txBody>
           <a:bodyPr wrap="square">
             <a:spAutoFit/>
           </a:bodyPr>
@@ -4581,92 +4848,238 @@
           <a:p>
             <a:pPr>
               <a:spcAft>
-                <a:spcPts val="700"/>
+                <a:spcPts val="500"/>
               </a:spcAft>
-              <a:defRPr sz="1800">
+              <a:defRPr sz="1300">
                 <a:solidFill>
                   <a:srgbClr val="222222"/>
                 </a:solidFill>
               </a:defRPr>
             </a:pPr>
             <a:r>
-              <a:t>• qwen3-1.7B is light, so the leftover ~11 KB is real headroom for KV.</a:t>
+              <a:rPr dirty="0"/>
+              <a:t>• Same shape as decode: ~23 KB CODE + ~11 KB weights per compute PE — but runs TIGHTER, ~82% full (~8 KB free vs </a:t>
+            </a:r>
+            <a:r>
+              <a:rPr dirty="0" err="1"/>
+              <a:t>decode's</a:t>
+            </a:r>
+            <a:r>
+              <a:rPr dirty="0"/>
+              <a:t> ~11 KB), because prefill carries the causal attention mask + larger </a:t>
+            </a:r>
+            <a:r>
+              <a:rPr dirty="0" err="1"/>
+              <a:t>MeshGEMM</a:t>
+            </a:r>
+            <a:r>
+              <a:rPr dirty="0"/>
+              <a:t> comm buffers.</a:t>
             </a:r>
           </a:p>
           <a:p>
             <a:pPr>
               <a:spcAft>
-                <a:spcPts val="700"/>
+                <a:spcPts val="500"/>
               </a:spcAft>
-              <a:defRPr sz="1800">
+              <a:defRPr sz="1300">
                 <a:solidFill>
                   <a:srgbClr val="222222"/>
                 </a:solidFill>
               </a:defRPr>
             </a:pPr>
             <a:r>
-              <a:t>• We swept the sequence length on real hardware (compile + place):</a:t>
-            </a:r>
-          </a:p>
-          <a:p>
-            <a:pPr lvl="1">
-              <a:spcAft>
-                <a:spcPts val="700"/>
-              </a:spcAft>
-              <a:defRPr sz="1500">
-                <a:solidFill>
-                  <a:srgbClr val="555555"/>
-                </a:solidFill>
-              </a:defRPr>
-            </a:pPr>
-            <a:r>
-              <a:t>– PASS up to 22,784 tokens; FAILS (out of memory) at 23,040.</a:t>
-            </a:r>
-          </a:p>
-          <a:p>
-            <a:pPr lvl="1">
-              <a:spcAft>
-                <a:spcPts val="700"/>
-              </a:spcAft>
-              <a:defRPr sz="1500">
-                <a:solidFill>
-                  <a:srgbClr val="555555"/>
-                </a:solidFill>
-              </a:defRPr>
-            </a:pPr>
-            <a:r>
-              <a:t>– That's 44.5x the shipped default of 512.</a:t>
+              <a:rPr dirty="0"/>
+              <a:t>• Op layout: ONE prefill region split into 2x2 logical blocks (vs </a:t>
+            </a:r>
+            <a:r>
+              <a:rPr dirty="0" err="1"/>
+              <a:t>decode's</a:t>
+            </a:r>
+            <a:r>
+              <a:rPr dirty="0"/>
+              <a:t> two stacked block-rows); same thin HT band — </a:t>
+            </a:r>
+            <a:r>
+              <a:rPr dirty="0" err="1"/>
+              <a:t>ht_head</a:t>
+            </a:r>
+            <a:r>
+              <a:rPr dirty="0"/>
+              <a:t> embedding (~38 KB, weight-bound) + </a:t>
+            </a:r>
+            <a:r>
+              <a:rPr dirty="0" err="1"/>
+              <a:t>ht_tail</a:t>
+            </a:r>
+            <a:r>
+              <a:rPr dirty="0"/>
+              <a:t> </a:t>
+            </a:r>
+            <a:r>
+              <a:rPr dirty="0" err="1"/>
+              <a:t>lm_head</a:t>
+            </a:r>
+            <a:r>
+              <a:rPr dirty="0"/>
+              <a:t>.</a:t>
             </a:r>
           </a:p>
           <a:p>
             <a:pPr>
               <a:spcAft>
-                <a:spcPts val="700"/>
+                <a:spcPts val="500"/>
               </a:spcAft>
-              <a:defRPr sz="1800">
+              <a:defRPr sz="1300">
                 <a:solidFill>
                   <a:srgbClr val="222222"/>
                 </a:solidFill>
               </a:defRPr>
             </a:pPr>
             <a:r>
-              <a:t>• KV costs ~0.44 bytes/token per core; the ~11 KB free fills until the last ~1 KB (needed for placement) is gone.</a:t>
-            </a:r>
-          </a:p>
-          <a:p>
-            <a:pPr>
-              <a:spcAft>
-                <a:spcPts val="700"/>
-              </a:spcAft>
-              <a:defRPr sz="1800">
-                <a:solidFill>
-                  <a:srgbClr val="222222"/>
-                </a:solidFill>
-              </a:defRPr>
-            </a:pPr>
-            <a:r>
-              <a:t>• Caveat: this is the compile/fit ceiling, for one request (batch size 1).</a:t>
-            </a:r>
+              <a:rPr dirty="0"/>
+              <a:t>• Same disaggregated-memory tax: the transformer-layer code is replicated on every compute core; KV is the squeezed residual.</a:t>
+            </a:r>
+          </a:p>
+        </p:txBody>
+      </p:sp>
+      <p:sp>
+        <p:nvSpPr>
+          <p:cNvPr id="9" name="Freeform 8">
+            <a:extLst>
+              <a:ext uri="{FF2B5EF4-FFF2-40B4-BE49-F238E27FC236}">
+                <a16:creationId xmlns:a16="http://schemas.microsoft.com/office/drawing/2014/main" id="{56EDB7F3-E065-AEBE-218E-44DC31445BA1}"/>
+              </a:ext>
+            </a:extLst>
+          </p:cNvPr>
+          <p:cNvSpPr/>
+          <p:nvPr/>
+        </p:nvSpPr>
+        <p:spPr>
+          <a:xfrm>
+            <a:off x="7014035" y="1013254"/>
+            <a:ext cx="3605028" cy="3694670"/>
+          </a:xfrm>
+          <a:custGeom>
+            <a:avLst/>
+            <a:gdLst>
+              <a:gd name="connsiteX0" fmla="*/ 140527 w 3605028"/>
+              <a:gd name="connsiteY0" fmla="*/ 3694670 h 3694670"/>
+              <a:gd name="connsiteX1" fmla="*/ 165241 w 3605028"/>
+              <a:gd name="connsiteY1" fmla="*/ 3039762 h 3694670"/>
+              <a:gd name="connsiteX2" fmla="*/ 1796333 w 3605028"/>
+              <a:gd name="connsiteY2" fmla="*/ 2953265 h 3694670"/>
+              <a:gd name="connsiteX3" fmla="*/ 3254430 w 3605028"/>
+              <a:gd name="connsiteY3" fmla="*/ 2965622 h 3694670"/>
+              <a:gd name="connsiteX4" fmla="*/ 3452138 w 3605028"/>
+              <a:gd name="connsiteY4" fmla="*/ 790832 h 3694670"/>
+              <a:gd name="connsiteX5" fmla="*/ 1326776 w 3605028"/>
+              <a:gd name="connsiteY5" fmla="*/ 494270 h 3694670"/>
+              <a:gd name="connsiteX6" fmla="*/ 251738 w 3605028"/>
+              <a:gd name="connsiteY6" fmla="*/ 494270 h 3694670"/>
+              <a:gd name="connsiteX7" fmla="*/ 91100 w 3605028"/>
+              <a:gd name="connsiteY7" fmla="*/ 0 h 3694670"/>
+            </a:gdLst>
+            <a:ahLst/>
+            <a:cxnLst>
+              <a:cxn ang="0">
+                <a:pos x="connsiteX0" y="connsiteY0"/>
+              </a:cxn>
+              <a:cxn ang="0">
+                <a:pos x="connsiteX1" y="connsiteY1"/>
+              </a:cxn>
+              <a:cxn ang="0">
+                <a:pos x="connsiteX2" y="connsiteY2"/>
+              </a:cxn>
+              <a:cxn ang="0">
+                <a:pos x="connsiteX3" y="connsiteY3"/>
+              </a:cxn>
+              <a:cxn ang="0">
+                <a:pos x="connsiteX4" y="connsiteY4"/>
+              </a:cxn>
+              <a:cxn ang="0">
+                <a:pos x="connsiteX5" y="connsiteY5"/>
+              </a:cxn>
+              <a:cxn ang="0">
+                <a:pos x="connsiteX6" y="connsiteY6"/>
+              </a:cxn>
+              <a:cxn ang="0">
+                <a:pos x="connsiteX7" y="connsiteY7"/>
+              </a:cxn>
+            </a:cxnLst>
+            <a:rect l="l" t="t" r="r" b="b"/>
+            <a:pathLst>
+              <a:path w="3605028" h="3694670">
+                <a:moveTo>
+                  <a:pt x="140527" y="3694670"/>
+                </a:moveTo>
+                <a:cubicBezTo>
+                  <a:pt x="14900" y="3428999"/>
+                  <a:pt x="-110727" y="3163329"/>
+                  <a:pt x="165241" y="3039762"/>
+                </a:cubicBezTo>
+                <a:cubicBezTo>
+                  <a:pt x="441209" y="2916194"/>
+                  <a:pt x="1281468" y="2965622"/>
+                  <a:pt x="1796333" y="2953265"/>
+                </a:cubicBezTo>
+                <a:cubicBezTo>
+                  <a:pt x="2311198" y="2940908"/>
+                  <a:pt x="2978463" y="3326027"/>
+                  <a:pt x="3254430" y="2965622"/>
+                </a:cubicBezTo>
+                <a:cubicBezTo>
+                  <a:pt x="3530397" y="2605217"/>
+                  <a:pt x="3773414" y="1202724"/>
+                  <a:pt x="3452138" y="790832"/>
+                </a:cubicBezTo>
+                <a:cubicBezTo>
+                  <a:pt x="3130862" y="378940"/>
+                  <a:pt x="1860176" y="543697"/>
+                  <a:pt x="1326776" y="494270"/>
+                </a:cubicBezTo>
+                <a:cubicBezTo>
+                  <a:pt x="793376" y="444843"/>
+                  <a:pt x="457684" y="576648"/>
+                  <a:pt x="251738" y="494270"/>
+                </a:cubicBezTo>
+                <a:cubicBezTo>
+                  <a:pt x="45792" y="411892"/>
+                  <a:pt x="68446" y="205946"/>
+                  <a:pt x="91100" y="0"/>
+                </a:cubicBezTo>
+              </a:path>
+            </a:pathLst>
+          </a:custGeom>
+          <a:noFill/>
+          <a:ln w="22225">
+            <a:solidFill>
+              <a:srgbClr val="C00000"/>
+            </a:solidFill>
+            <a:tailEnd type="triangle"/>
+          </a:ln>
+          <a:effectLst/>
+        </p:spPr>
+        <p:style>
+          <a:lnRef idx="1">
+            <a:schemeClr val="accent1"/>
+          </a:lnRef>
+          <a:fillRef idx="3">
+            <a:schemeClr val="accent1"/>
+          </a:fillRef>
+          <a:effectRef idx="2">
+            <a:schemeClr val="accent1"/>
+          </a:effectRef>
+          <a:fontRef idx="minor">
+            <a:schemeClr val="lt1"/>
+          </a:fontRef>
+        </p:style>
+        <p:txBody>
+          <a:bodyPr rtlCol="0" anchor="ctr"/>
+          <a:lstStyle/>
+          <a:p>
+            <a:pPr algn="ctr"/>
+            <a:endParaRPr lang="en-US"/>
           </a:p>
         </p:txBody>
       </p:sp>
@@ -4769,45 +5182,21 @@
               </a:defRPr>
             </a:pPr>
             <a:r>
-              <a:t>Finding 3: 'colors' are the other scarce resource</a:t>
-            </a:r>
-          </a:p>
-        </p:txBody>
-      </p:sp>
-      <p:pic>
-        <p:nvPicPr>
-          <p:cNvPr id="4" name="Picture 3" descr="decode_color_usage.png"/>
-          <p:cNvPicPr>
-            <a:picLocks noChangeAspect="1"/>
-          </p:cNvPicPr>
-          <p:nvPr/>
-        </p:nvPicPr>
-        <p:blipFill>
-          <a:blip r:embed="rId2"/>
-          <a:stretch>
-            <a:fillRect/>
-          </a:stretch>
-        </p:blipFill>
-        <p:spPr>
-          <a:xfrm>
-            <a:off x="365760" y="1005840"/>
-            <a:ext cx="6280045" cy="4572000"/>
-          </a:xfrm>
-          <a:prstGeom prst="rect">
-            <a:avLst/>
-          </a:prstGeom>
-        </p:spPr>
-      </p:pic>
-      <p:sp>
-        <p:nvSpPr>
-          <p:cNvPr id="5" name="TextBox 4"/>
+              <a:t>Finding 2: max context = 22,784 tokens (44x the default)</a:t>
+            </a:r>
+          </a:p>
+        </p:txBody>
+      </p:sp>
+      <p:sp>
+        <p:nvSpPr>
+          <p:cNvPr id="4" name="TextBox 3"/>
           <p:cNvSpPr txBox="1"/>
           <p:nvPr/>
         </p:nvSpPr>
         <p:spPr>
           <a:xfrm>
-            <a:off x="8412480" y="1097280"/>
-            <a:ext cx="3566160" cy="5394960"/>
+            <a:off x="457200" y="1097280"/>
+            <a:ext cx="11430000" cy="5394960"/>
           </a:xfrm>
           <a:prstGeom prst="rect">
             <a:avLst/>
@@ -4822,61 +5211,91 @@
           <a:p>
             <a:pPr>
               <a:spcAft>
-                <a:spcPts val="800"/>
+                <a:spcPts val="700"/>
+              </a:spcAft>
+              <a:defRPr sz="1800">
+                <a:solidFill>
+                  <a:srgbClr val="222222"/>
+                </a:solidFill>
+              </a:defRPr>
+            </a:pPr>
+            <a:r>
+              <a:t>• qwen3-1.7B is light, so the leftover ~11 KB is real headroom for KV.</a:t>
+            </a:r>
+          </a:p>
+          <a:p>
+            <a:pPr>
+              <a:spcAft>
+                <a:spcPts val="700"/>
+              </a:spcAft>
+              <a:defRPr sz="1800">
+                <a:solidFill>
+                  <a:srgbClr val="222222"/>
+                </a:solidFill>
+              </a:defRPr>
+            </a:pPr>
+            <a:r>
+              <a:t>• We swept the sequence length on real hardware (compile + place):</a:t>
+            </a:r>
+          </a:p>
+          <a:p>
+            <a:pPr lvl="1">
+              <a:spcAft>
+                <a:spcPts val="700"/>
               </a:spcAft>
               <a:defRPr sz="1500">
                 <a:solidFill>
-                  <a:srgbClr val="222222"/>
-                </a:solidFill>
-              </a:defRPr>
-            </a:pPr>
-            <a:r>
-              <a:t>• 24 fabric 'colors' = communication channels. We mapped which are used in each microstep.</a:t>
+                  <a:srgbClr val="555555"/>
+                </a:solidFill>
+              </a:defRPr>
+            </a:pPr>
+            <a:r>
+              <a:t>– PASS up to 22,784 tokens; FAILS (out of memory) at 23,040.</a:t>
+            </a:r>
+          </a:p>
+          <a:p>
+            <a:pPr lvl="1">
+              <a:spcAft>
+                <a:spcPts val="700"/>
+              </a:spcAft>
+              <a:defRPr sz="1500">
+                <a:solidFill>
+                  <a:srgbClr val="555555"/>
+                </a:solidFill>
+              </a:defRPr>
+            </a:pPr>
+            <a:r>
+              <a:t>– That's 44.5x the shipped default of 512.</a:t>
             </a:r>
           </a:p>
           <a:p>
             <a:pPr>
               <a:spcAft>
-                <a:spcPts val="800"/>
+                <a:spcPts val="700"/>
               </a:spcAft>
-              <a:defRPr sz="1500">
+              <a:defRPr sz="1800">
                 <a:solidFill>
                   <a:srgbClr val="222222"/>
                 </a:solidFill>
               </a:defRPr>
             </a:pPr>
             <a:r>
-              <a:t>• DECODE uses only 8/24 on a compute core...</a:t>
+              <a:t>• KV costs ~0.44 bytes/token per core; the ~11 KB free fills until the last ~1 KB (needed for placement) is gone.</a:t>
             </a:r>
           </a:p>
           <a:p>
             <a:pPr>
               <a:spcAft>
-                <a:spcPts val="800"/>
+                <a:spcPts val="700"/>
               </a:spcAft>
-              <a:defRPr sz="1500">
+              <a:defRPr sz="1800">
                 <a:solidFill>
                   <a:srgbClr val="222222"/>
                 </a:solidFill>
               </a:defRPr>
             </a:pPr>
             <a:r>
-              <a:t>• ...because it REUSES 5 channels, repainting their routes 6x per layer (Y / X / band = the reduce direction).</a:t>
-            </a:r>
-          </a:p>
-          <a:p>
-            <a:pPr>
-              <a:spcAft>
-                <a:spcPts val="800"/>
-              </a:spcAft>
-              <a:defRPr sz="1500">
-                <a:solidFill>
-                  <a:srgbClr val="222222"/>
-                </a:solidFill>
-              </a:defRPr>
-            </a:pPr>
-            <a:r>
-              <a:t>• Local steps (RoPE, residuals) use no fabric at all.</a:t>
+              <a:t>• Caveat: this is the compile/fit ceiling, for one request (batch size 1).</a:t>
             </a:r>
           </a:p>
         </p:txBody>
@@ -4980,112 +5399,14 @@
               </a:defRPr>
             </a:pPr>
             <a:r>
-              <a:t>The decode &lt;-&gt; prefill trade-off</a:t>
-            </a:r>
-          </a:p>
-        </p:txBody>
-      </p:sp>
-      <p:sp>
-        <p:nvSpPr>
-          <p:cNvPr id="4" name="TextBox 3"/>
-          <p:cNvSpPr txBox="1"/>
-          <p:nvPr/>
-        </p:nvSpPr>
-        <p:spPr>
-          <a:xfrm>
-            <a:off x="457200" y="1097280"/>
-            <a:ext cx="5486400" cy="5394960"/>
-          </a:xfrm>
-          <a:prstGeom prst="rect">
-            <a:avLst/>
-          </a:prstGeom>
-          <a:noFill/>
-        </p:spPr>
-        <p:txBody>
-          <a:bodyPr wrap="square">
-            <a:spAutoFit/>
-          </a:bodyPr>
-          <a:lstStyle/>
-          <a:p>
-            <a:pPr>
-              <a:spcAft>
-                <a:spcPts val="700"/>
-              </a:spcAft>
-              <a:defRPr sz="1800">
-                <a:solidFill>
-                  <a:srgbClr val="222222"/>
-                </a:solidFill>
-              </a:defRPr>
-            </a:pPr>
-            <a:r>
-              <a:t>• DECODE = color-frugal, reconfiguration-heavy: 8/24 colors; reuses 5 and repaints their routes every step.</a:t>
-            </a:r>
-          </a:p>
-          <a:p>
-            <a:pPr>
-              <a:spcAft>
-                <a:spcPts val="700"/>
-              </a:spcAft>
-              <a:defRPr sz="1800">
-                <a:solidFill>
-                  <a:srgbClr val="222222"/>
-                </a:solidFill>
-              </a:defRPr>
-            </a:pPr>
-            <a:r>
-              <a:t>• PREFILL = color-hungry, reconfiguration-light: 17/24 colors.</a:t>
-            </a:r>
-          </a:p>
-          <a:p>
-            <a:pPr lvl="1">
-              <a:spcAft>
-                <a:spcPts val="700"/>
-              </a:spcAft>
-              <a:defRPr sz="1500">
-                <a:solidFill>
-                  <a:srgbClr val="555555"/>
-                </a:solidFill>
-              </a:defRPr>
-            </a:pPr>
-            <a:r>
-              <a:t>– Its matmuls use a systolic 'MeshGEMM' with 6 dedicated, statically-routed channels (never repainted mid-matmul).</a:t>
-            </a:r>
-          </a:p>
-          <a:p>
-            <a:pPr>
-              <a:spcAft>
-                <a:spcPts val="700"/>
-              </a:spcAft>
-              <a:defRPr sz="1800">
-                <a:solidFill>
-                  <a:srgbClr val="222222"/>
-                </a:solidFill>
-              </a:defRPr>
-            </a:pPr>
-            <a:r>
-              <a:t>• So the two kernels trade the SAME two resources differently: decode spends route-repaint time to save colors; prefill spends colors to save time.</a:t>
-            </a:r>
-          </a:p>
-          <a:p>
-            <a:pPr>
-              <a:spcAft>
-                <a:spcPts val="700"/>
-              </a:spcAft>
-              <a:defRPr sz="1800">
-                <a:solidFill>
-                  <a:srgbClr val="222222"/>
-                </a:solidFill>
-              </a:defRPr>
-            </a:pPr>
-            <a:r>
-              <a:t>• Both fit comfortably — neither is color-bound today.</a:t>
+              <a:t>Finding 3: 'colors' are the other scarce resource</a:t>
             </a:r>
           </a:p>
         </p:txBody>
       </p:sp>
       <p:pic>
         <p:nvPicPr>
-          <p:cNvPr id="5" name="Picture 4" descr="prefill_color_usage.png"/>
+          <p:cNvPr id="4" name="Picture 3" descr="decode_color_usage.png"/>
           <p:cNvPicPr>
             <a:picLocks noChangeAspect="1"/>
           </p:cNvPicPr>
@@ -5099,8 +5420,8 @@
         </p:blipFill>
         <p:spPr>
           <a:xfrm>
-            <a:off x="6126480" y="1143000"/>
-            <a:ext cx="5760720" cy="4294422"/>
+            <a:off x="365760" y="1005840"/>
+            <a:ext cx="6280045" cy="4572000"/>
           </a:xfrm>
           <a:prstGeom prst="rect">
             <a:avLst/>
@@ -5109,14 +5430,14 @@
       </p:pic>
       <p:sp>
         <p:nvSpPr>
-          <p:cNvPr id="6" name="TextBox 5"/>
+          <p:cNvPr id="5" name="TextBox 4"/>
           <p:cNvSpPr txBox="1"/>
           <p:nvPr/>
         </p:nvSpPr>
         <p:spPr>
           <a:xfrm>
-            <a:off x="6126480" y="6172200"/>
-            <a:ext cx="5760720" cy="457200"/>
+            <a:off x="8412480" y="1097280"/>
+            <a:ext cx="3566160" cy="5394960"/>
           </a:xfrm>
           <a:prstGeom prst="rect">
             <a:avLst/>
@@ -5129,15 +5450,63 @@
           </a:bodyPr>
           <a:lstStyle/>
           <a:p>
-            <a:pPr algn="ctr">
-              <a:defRPr sz="1100" i="1">
-                <a:solidFill>
-                  <a:srgbClr val="555555"/>
-                </a:solidFill>
-              </a:defRPr>
-            </a:pPr>
-            <a:r>
-              <a:t>Prefill: 17/24 colors (MeshGEMM-heavy)</a:t>
+            <a:pPr>
+              <a:spcAft>
+                <a:spcPts val="800"/>
+              </a:spcAft>
+              <a:defRPr sz="1500">
+                <a:solidFill>
+                  <a:srgbClr val="222222"/>
+                </a:solidFill>
+              </a:defRPr>
+            </a:pPr>
+            <a:r>
+              <a:t>• 24 fabric 'colors' = communication channels. We mapped which are used in each microstep.</a:t>
+            </a:r>
+          </a:p>
+          <a:p>
+            <a:pPr>
+              <a:spcAft>
+                <a:spcPts val="800"/>
+              </a:spcAft>
+              <a:defRPr sz="1500">
+                <a:solidFill>
+                  <a:srgbClr val="222222"/>
+                </a:solidFill>
+              </a:defRPr>
+            </a:pPr>
+            <a:r>
+              <a:t>• DECODE uses only 8/24 on a compute core...</a:t>
+            </a:r>
+          </a:p>
+          <a:p>
+            <a:pPr>
+              <a:spcAft>
+                <a:spcPts val="800"/>
+              </a:spcAft>
+              <a:defRPr sz="1500">
+                <a:solidFill>
+                  <a:srgbClr val="222222"/>
+                </a:solidFill>
+              </a:defRPr>
+            </a:pPr>
+            <a:r>
+              <a:t>• ...because it REUSES 5 channels, repainting their routes 6x per layer (Y / X / band = the reduce direction).</a:t>
+            </a:r>
+          </a:p>
+          <a:p>
+            <a:pPr>
+              <a:spcAft>
+                <a:spcPts val="800"/>
+              </a:spcAft>
+              <a:defRPr sz="1500">
+                <a:solidFill>
+                  <a:srgbClr val="222222"/>
+                </a:solidFill>
+              </a:defRPr>
+            </a:pPr>
+            <a:r>
+              <a:t>• Local steps (RoPE, residuals) use no fabric at all.</a:t>
             </a:r>
           </a:p>
         </p:txBody>
@@ -5241,7 +5610,7 @@
               </a:defRPr>
             </a:pPr>
             <a:r>
-              <a:t>Takeaways &amp; where to find everything</a:t>
+              <a:t>The decode &lt;-&gt; prefill trade-off</a:t>
             </a:r>
           </a:p>
         </p:txBody>
@@ -5255,7 +5624,7 @@
         <p:spPr>
           <a:xfrm>
             <a:off x="457200" y="1097280"/>
-            <a:ext cx="11430000" cy="5394960"/>
+            <a:ext cx="5486400" cy="5394960"/>
           </a:xfrm>
           <a:prstGeom prst="rect">
             <a:avLst/>
@@ -5279,7 +5648,7 @@
               </a:defRPr>
             </a:pPr>
             <a:r>
-              <a:t>• Two scarce per-core resources on the wafer: 48 KB SRAM and 24 colors.</a:t>
+              <a:t>• DECODE = color-frugal, reconfiguration-heavy: 8/24 colors; reuses 5 and repaints their routes every step.</a:t>
             </a:r>
           </a:p>
           <a:p>
@@ -5294,7 +5663,22 @@
               </a:defRPr>
             </a:pPr>
             <a:r>
-              <a:t>• SRAM: code (~half) is the dominant, replicated cost; KV is the residual; max context = 22,784 tokens (measured).</a:t>
+              <a:t>• PREFILL = color-hungry, reconfiguration-light: 17/24 colors.</a:t>
+            </a:r>
+          </a:p>
+          <a:p>
+            <a:pPr lvl="1">
+              <a:spcAft>
+                <a:spcPts val="700"/>
+              </a:spcAft>
+              <a:defRPr sz="1500">
+                <a:solidFill>
+                  <a:srgbClr val="555555"/>
+                </a:solidFill>
+              </a:defRPr>
+            </a:pPr>
+            <a:r>
+              <a:t>– Its matmuls use a systolic 'MeshGEMM' with 6 dedicated, statically-routed channels (never repainted mid-matmul).</a:t>
             </a:r>
           </a:p>
           <a:p>
@@ -5309,7 +5693,7 @@
               </a:defRPr>
             </a:pPr>
             <a:r>
-              <a:t>• Colors: decode 8/24 (reconfig-heavy), prefill 17/24 (MeshGEMM-heavy); neither is color-bound.</a:t>
+              <a:t>• So the two kernels trade the SAME two resources differently: decode spends route-repaint time to save colors; prefill spends colors to save time.</a:t>
             </a:r>
           </a:p>
           <a:p>
@@ -5324,52 +5708,66 @@
               </a:defRPr>
             </a:pPr>
             <a:r>
-              <a:t>• All analysis is per-role static -&gt; cheap and reproducible.</a:t>
-            </a:r>
-          </a:p>
-          <a:p>
-            <a:pPr>
-              <a:spcAft>
-                <a:spcPts val="700"/>
-              </a:spcAft>
-              <a:defRPr sz="1800">
-                <a:solidFill>
-                  <a:srgbClr val="222222"/>
-                </a:solidFill>
-              </a:defRPr>
-            </a:pPr>
-            <a:r>
-              <a:t>• Traceable: branch  lexu/pe-mem-breakdown   (WaferEngine repo).</a:t>
-            </a:r>
-          </a:p>
-          <a:p>
-            <a:pPr lvl="1">
-              <a:spcAft>
-                <a:spcPts val="700"/>
-              </a:spcAft>
-              <a:defRPr sz="1500">
+              <a:t>• Both fit comfortably — neither is color-bound today.</a:t>
+            </a:r>
+          </a:p>
+        </p:txBody>
+      </p:sp>
+      <p:pic>
+        <p:nvPicPr>
+          <p:cNvPr id="5" name="Picture 4" descr="prefill_color_usage.png"/>
+          <p:cNvPicPr>
+            <a:picLocks noChangeAspect="1"/>
+          </p:cNvPicPr>
+          <p:nvPr/>
+        </p:nvPicPr>
+        <p:blipFill>
+          <a:blip r:embed="rId2"/>
+          <a:stretch>
+            <a:fillRect/>
+          </a:stretch>
+        </p:blipFill>
+        <p:spPr>
+          <a:xfrm>
+            <a:off x="6126480" y="1143000"/>
+            <a:ext cx="5760720" cy="4294422"/>
+          </a:xfrm>
+          <a:prstGeom prst="rect">
+            <a:avLst/>
+          </a:prstGeom>
+        </p:spPr>
+      </p:pic>
+      <p:sp>
+        <p:nvSpPr>
+          <p:cNvPr id="6" name="TextBox 5"/>
+          <p:cNvSpPr txBox="1"/>
+          <p:nvPr/>
+        </p:nvSpPr>
+        <p:spPr>
+          <a:xfrm>
+            <a:off x="6126480" y="6172200"/>
+            <a:ext cx="5760720" cy="457200"/>
+          </a:xfrm>
+          <a:prstGeom prst="rect">
+            <a:avLst/>
+          </a:prstGeom>
+          <a:noFill/>
+        </p:spPr>
+        <p:txBody>
+          <a:bodyPr wrap="square">
+            <a:spAutoFit/>
+          </a:bodyPr>
+          <a:lstStyle/>
+          <a:p>
+            <a:pPr algn="ctr">
+              <a:defRPr sz="1100" i="1">
                 <a:solidFill>
                   <a:srgbClr val="555555"/>
                 </a:solidFill>
               </a:defRPr>
             </a:pPr>
             <a:r>
-              <a:t>– tool + plots: tools/pe_mem_breakdown/   ·   results/{decode,prefill}/</a:t>
-            </a:r>
-          </a:p>
-          <a:p>
-            <a:pPr lvl="1">
-              <a:spcAft>
-                <a:spcPts val="700"/>
-              </a:spcAft>
-              <a:defRPr sz="1500">
-                <a:solidFill>
-                  <a:srgbClr val="555555"/>
-                </a:solidFill>
-              </a:defRPr>
-            </a:pPr>
-            <a:r>
-              <a:t>– key commits: 33ecf27 (heatmaps), 023cf1d (seq-len probe), 0869200 (color map).</a:t>
+              <a:t>Prefill: 17/24 colors (MeshGEMM-heavy)</a:t>
             </a:r>
           </a:p>
         </p:txBody>
